--- a/slides/pptx/week17.pptx
+++ b/slides/pptx/week17.pptx
@@ -12,9 +12,10 @@
     <p:sldId id="260" r:id="rId6"/>
     <p:sldId id="261" r:id="rId7"/>
     <p:sldId id="262" r:id="rId8"/>
+    <p:sldId id="263" r:id="rId9"/>
   </p:sldIdLst>
   <p:notesMasterIdLst>
-    <p:notesMasterId r:id="rId9"/>
+    <p:notesMasterId r:id="rId10"/>
   </p:notesMasterIdLst>
   <p:sldSz cx="9144000" cy="5143500"/>
   <p:notesSz cx="5143500" cy="9144000"/>
@@ -684,7 +685,7 @@
           <a:p>
             <a:r>
               <a:rPr lang="en-US" dirty="0"/>
-              <a:t>Cold-call one student per row for the one-liner (retrieval). Add 2–3 first-half callbacks (injection, auth) since the final is cumulative. ~10 min.</a:t>
+              <a:t>Cold-call one student per row for the one-liner (retrieval). Week 16 gets its own row (this slide's own subtitle says "Weeks 10-16") but flag it as differently-assessed — quiz2.md doesn't examine it, the W19 demo does. Add 2–3 first-half callbacks (injection, auth) since the final is cumulative. ~10 min.</a:t>
             </a:r>
             <a:endParaRPr lang="en-US" dirty="0"/>
           </a:p>
@@ -772,7 +773,7 @@
           <a:p>
             <a:r>
               <a:rPr lang="en-US" dirty="0"/>
-              <a:t>Same run as W7 but whole-course. Seed questions from exams/item-bank.md (final pool). Teams = Houses; Final-Jeopardy wager; points to the CTFd board. ~60–75 min.</a:t>
+              <a:t>Same run as W7 but whole-course. Seed questions from exams/item-bank.md (final pool). Weight the board toward DevSecOps and first-half callbacks, not more API questions — the mock CTF right after this covers API well; it has ZERO DevSecOps or Capstone coverage, and DevSecOps alone is 15 of the Wk18 written exam's 100 marks. Say this gap out loud to the room. Teams = Houses; Final-Jeopardy wager; points to the CTFd board. ~75 min.</a:t>
             </a:r>
             <a:endParaRPr lang="en-US" dirty="0"/>
           </a:p>
@@ -860,7 +861,7 @@
           <a:p>
             <a:r>
               <a:rPr lang="en-US" dirty="0"/>
-              <a:t>Run the EXACT W19 team format (mock-ctf.md / CTF pool), incl. a binary (toolbox container) + LLM challenge so nothing is new on final day. ~90 min.</a:t>
+              <a:t>Correct the "same format" framing head-on — this course's own lesson-plan notes exist specifically because instructors kept saying "same as the final" and it isn't. Also correct a second, easy-to-repeat mistake: don't say "W19 is 25% of the final grade" — the 25% is the combined W18+W19 average; W19 alone is roughly half that. And don't imply DevSecOps/Capstone show up in W19 either — neither ctf.md nor the mock ever tests them, they're W18-written-only. Run mock-ctf.md / CTF pool, incl. a binary (toolbox container) + LLM challenge. Budget: 150 min per AGENDA (quiz 30 + Jeopardy 75 + break 15 + mock 150 + debrief 30 = 300 total) — not 90, that's a 60-min undercount that will visibly break the room's pacing. ~150 min.</a:t>
             </a:r>
             <a:endParaRPr lang="en-US" dirty="0"/>
           </a:p>
@@ -948,7 +949,7 @@
           <a:p>
             <a:r>
               <a:rPr lang="en-US" dirty="0"/>
-              <a:t>State scope + logistics clearly. Remind teams the W19 demo is graded — bring a runnable project. ~3 min.</a:t>
+              <a:t>Correct the "same format" framing head-on — this course's own lesson-plan notes exist specifically because instructors kept saying "same as the final" and it isn't. Also correct a second, easy-to-repeat mistake: don't say "W19 is 25% of the final grade" — the 25% is the combined W18+W19 average; W19 alone is roughly half that. And don't imply DevSecOps/Capstone show up in W19 either — neither ctf.md nor the mock ever tests them, they're W18-written-only. Run mock-ctf.md / CTF pool, incl. a binary (toolbox container) + LLM challenge. Budget: 150 min per AGENDA (quiz 30 + Jeopardy 75 + break 15 + mock 150 + debrief 30 = 300 total) — not 90, that's a 60-min undercount that will visibly break the room's pacing. ~150 min.</a:t>
             </a:r>
             <a:endParaRPr lang="en-US" dirty="0"/>
           </a:p>
@@ -1036,7 +1037,7 @@
           <a:p>
             <a:r>
               <a:rPr lang="en-US" dirty="0"/>
-              <a:t>Close: checklist of what to bring to W19; confirm project repos run.</a:t>
+              <a:t>State scope + logistics clearly — 10-15, not 10-16 (this was deliberately corrected in exam.md, don't reintroduce the old range here). W19's demo format changed too: pre-recorded + async grading, because the old live-demo format can't fit N≈80-120 students into a 90-min block. Remind teams the W19 demo is graded — bring a runnable project + the video. ~3 min.</a:t>
             </a:r>
             <a:endParaRPr lang="en-US" dirty="0"/>
           </a:p>
@@ -1060,6 +1061,94 @@
             <a:fld id="{F7021451-1387-4CA6-816F-3879F97B5CBC}" type="slidenum">
               <a:rPr lang="en-US"/>
               <a:t>7</a:t>
+            </a:fld>
+            <a:endParaRPr lang="en-US"/>
+          </a:p>
+        </p:txBody>
+      </p:sp>
+    </p:spTree>
+    <p:extLst>
+      <p:ext uri="{BB962C8B-B14F-4D97-AF65-F5344CB8AC3E}">
+        <p14:creationId xmlns:p14="http://schemas.microsoft.com/office/powerpoint/2010/main" val="1024086991"/>
+      </p:ext>
+    </p:extLst>
+  </p:cSld>
+  <p:clrMapOvr>
+    <a:masterClrMapping/>
+  </p:clrMapOvr>
+</p:notes>
+</file>
+
+<file path=ppt/notesSlides/notesSlide8.xml><?xml version="1.0" encoding="utf-8"?>
+<p:notes xmlns:a="http://schemas.openxmlformats.org/drawingml/2006/main" xmlns:r="http://schemas.openxmlformats.org/officeDocument/2006/relationships" xmlns:p="http://schemas.openxmlformats.org/presentationml/2006/main">
+  <p:cSld>
+    <p:spTree>
+      <p:nvGrpSpPr>
+        <p:cNvPr id="1" name=""/>
+        <p:cNvGrpSpPr/>
+        <p:nvPr/>
+      </p:nvGrpSpPr>
+      <p:grpSpPr>
+        <a:xfrm>
+          <a:off x="0" y="0"/>
+          <a:ext cx="0" cy="0"/>
+          <a:chOff x="0" y="0"/>
+          <a:chExt cx="0" cy="0"/>
+        </a:xfrm>
+      </p:grpSpPr>
+      <p:sp>
+        <p:nvSpPr>
+          <p:cNvPr id="2" name="Slide Image Placeholder 1"/>
+          <p:cNvSpPr>
+            <a:spLocks noGrp="1" noRot="1" noChangeAspect="1"/>
+          </p:cNvSpPr>
+          <p:nvPr>
+            <p:ph type="sldImg"/>
+          </p:nvPr>
+        </p:nvSpPr>
+        <p:spPr/>
+      </p:sp>
+      <p:sp>
+        <p:nvSpPr>
+          <p:cNvPr id="3" name="Notes Placeholder 2"/>
+          <p:cNvSpPr>
+            <a:spLocks noGrp="1"/>
+          </p:cNvSpPr>
+          <p:nvPr>
+            <p:ph type="body" idx="1"/>
+          </p:nvPr>
+        </p:nvSpPr>
+        <p:spPr/>
+        <p:txBody>
+          <a:bodyPr/>
+          <a:lstStyle/>
+          <a:p>
+            <a:r>
+              <a:rPr lang="en-US" dirty="0"/>
+              <a:t>Close: checklist of what to bring to W19; confirm project repos run.</a:t>
+            </a:r>
+            <a:endParaRPr lang="en-US" dirty="0"/>
+          </a:p>
+        </p:txBody>
+      </p:sp>
+      <p:sp>
+        <p:nvSpPr>
+          <p:cNvPr id="4" name="Slide Number Placeholder 3"/>
+          <p:cNvSpPr>
+            <a:spLocks noGrp="1"/>
+          </p:cNvSpPr>
+          <p:nvPr>
+            <p:ph type="sldNum" sz="quarter" idx="10"/>
+          </p:nvPr>
+        </p:nvSpPr>
+        <p:spPr/>
+        <p:txBody>
+          <a:bodyPr/>
+          <a:lstStyle/>
+          <a:p>
+            <a:fld id="{F7021451-1387-4CA6-816F-3879F97B5CBC}" type="slidenum">
+              <a:rPr lang="en-US"/>
+              <a:t>8</a:t>
             </a:fld>
             <a:endParaRPr lang="en-US"/>
           </a:p>
@@ -1684,11 +1773,11 @@
         <p:spPr>
           <a:xfrm>
             <a:off x="457200" y="1325880"/>
-            <a:ext cx="8229600" cy="1207008"/>
+            <a:ext cx="8229600" cy="1408176"/>
           </a:xfrm>
           <a:prstGeom prst="roundRect">
             <a:avLst>
-              <a:gd name="adj" fmla="val 6061"/>
+              <a:gd name="adj" fmla="val 5195"/>
             </a:avLst>
           </a:prstGeom>
           <a:solidFill>
@@ -1713,7 +1802,7 @@
         <p:spPr>
           <a:xfrm>
             <a:off x="731520" y="1435608"/>
-            <a:ext cx="7680960" cy="987552"/>
+            <a:ext cx="7680960" cy="1188720"/>
           </a:xfrm>
           <a:prstGeom prst="rect">
             <a:avLst/>
@@ -1722,7 +1811,9 @@
           <a:ln/>
         </p:spPr>
         <p:txBody>
-          <a:bodyPr wrap="square" lIns="0" tIns="0" rIns="0" bIns="0" rtlCol="0" anchor="t"/>
+          <a:bodyPr wrap="square" lIns="0" tIns="0" rIns="0" bIns="0" rtlCol="0" anchor="t">
+            <a:normAutofit/>
+          </a:bodyPr>
           <a:lstStyle/>
           <a:p>
             <a:pPr marL="342900" indent="-342900">
@@ -1783,7 +1874,7 @@
                 <a:ea typeface="Calibri" pitchFamily="34" charset="-122"/>
                 <a:cs typeface="Calibri" pitchFamily="34" charset="-120"/>
               </a:rPr>
-              <a:t>🧪 Mock final CTF (Week 19 format)</a:t>
+              <a:t>🧪 Mock final CTF (same team mechanic as Week 19 — not the same coverage, see below)</a:t>
             </a:r>
             <a:endParaRPr lang="en-US" sz="1400" dirty="0"/>
           </a:p>
@@ -2001,7 +2092,7 @@
                 <a:gridCol w="2743200"/>
                 <a:gridCol w="2743200"/>
               </a:tblGrid>
-              <a:tr h="420624">
+              <a:tr h="405765">
                 <a:tc>
                   <a:txBody>
                     <a:bodyPr/>
@@ -2186,7 +2277,7 @@
                   </a:tcPr>
                 </a:tc>
               </a:tr>
-              <a:tr h="420624">
+              <a:tr h="405765">
                 <a:tc>
                   <a:txBody>
                     <a:bodyPr/>
@@ -2371,7 +2462,7 @@
                   </a:tcPr>
                 </a:tc>
               </a:tr>
-              <a:tr h="420624">
+              <a:tr h="405765">
                 <a:tc>
                   <a:txBody>
                     <a:bodyPr/>
@@ -2556,7 +2647,7 @@
                   </a:tcPr>
                 </a:tc>
               </a:tr>
-              <a:tr h="420624">
+              <a:tr h="405765">
                 <a:tc>
                   <a:txBody>
                     <a:bodyPr/>
@@ -2741,7 +2832,7 @@
                   </a:tcPr>
                 </a:tc>
               </a:tr>
-              <a:tr h="420624">
+              <a:tr h="405765">
                 <a:tc>
                   <a:txBody>
                     <a:bodyPr/>
@@ -2926,7 +3017,7 @@
                   </a:tcPr>
                 </a:tc>
               </a:tr>
-              <a:tr h="420624">
+              <a:tr h="405765">
                 <a:tc>
                   <a:txBody>
                     <a:bodyPr/>
@@ -3111,7 +3202,7 @@
                   </a:tcPr>
                 </a:tc>
               </a:tr>
-              <a:tr h="420624">
+              <a:tr h="405765">
                 <a:tc>
                   <a:txBody>
                     <a:bodyPr/>
@@ -3292,6 +3383,191 @@
                     </a:lnB>
                     <a:solidFill>
                       <a:srgbClr val="E8EDF3"/>
+                    </a:solidFill>
+                  </a:tcPr>
+                </a:tc>
+              </a:tr>
+              <a:tr h="405765">
+                <a:tc>
+                  <a:txBody>
+                    <a:bodyPr/>
+                    <a:lstStyle/>
+                    <a:p>
+                      <a:pPr algn="l" indent="0" marL="0">
+                        <a:buNone/>
+                      </a:pPr>
+                      <a:r>
+                        <a:rPr lang="en-US" sz="1200" dirty="0">
+                          <a:solidFill>
+                            <a:srgbClr val="1F2937"/>
+                          </a:solidFill>
+                        </a:rPr>
+                        <a:t>16</a:t>
+                      </a:r>
+                      <a:endParaRPr lang="en-US" sz="1200" dirty="0"/>
+                    </a:p>
+                  </a:txBody>
+                  <a:tcPr marL="76200" marR="76200" marT="38100" marB="38100" anchor="ctr">
+                    <a:lnL w="12700" cap="flat" cmpd="sng" algn="ctr">
+                      <a:solidFill>
+                        <a:srgbClr val="FFFFFF"/>
+                      </a:solidFill>
+                      <a:prstDash val="solid"/>
+                      <a:round/>
+                      <a:headEnd type="none" w="med" len="med"/>
+                      <a:tailEnd type="none" w="med" len="med"/>
+                    </a:lnL>
+                    <a:lnR w="12700" cap="flat" cmpd="sng" algn="ctr">
+                      <a:solidFill>
+                        <a:srgbClr val="FFFFFF"/>
+                      </a:solidFill>
+                      <a:prstDash val="solid"/>
+                      <a:round/>
+                      <a:headEnd type="none" w="med" len="med"/>
+                      <a:tailEnd type="none" w="med" len="med"/>
+                    </a:lnR>
+                    <a:lnT w="12700" cap="flat" cmpd="sng" algn="ctr">
+                      <a:solidFill>
+                        <a:srgbClr val="FFFFFF"/>
+                      </a:solidFill>
+                      <a:prstDash val="solid"/>
+                      <a:round/>
+                      <a:headEnd type="none" w="med" len="med"/>
+                      <a:tailEnd type="none" w="med" len="med"/>
+                    </a:lnT>
+                    <a:lnB w="12700" cap="flat" cmpd="sng" algn="ctr">
+                      <a:solidFill>
+                        <a:srgbClr val="FFFFFF"/>
+                      </a:solidFill>
+                      <a:prstDash val="solid"/>
+                      <a:round/>
+                      <a:headEnd type="none" w="med" len="med"/>
+                      <a:tailEnd type="none" w="med" len="med"/>
+                    </a:lnB>
+                    <a:solidFill>
+                      <a:srgbClr val="F1F5F9"/>
+                    </a:solidFill>
+                  </a:tcPr>
+                </a:tc>
+                <a:tc>
+                  <a:txBody>
+                    <a:bodyPr/>
+                    <a:lstStyle/>
+                    <a:p>
+                      <a:pPr algn="l" indent="0" marL="0">
+                        <a:buNone/>
+                      </a:pPr>
+                      <a:r>
+                        <a:rPr lang="en-US" sz="1200" dirty="0">
+                          <a:solidFill>
+                            <a:srgbClr val="1F2937"/>
+                          </a:solidFill>
+                        </a:rPr>
+                        <a:t>Capstone</a:t>
+                      </a:r>
+                      <a:endParaRPr lang="en-US" sz="1200" dirty="0"/>
+                    </a:p>
+                  </a:txBody>
+                  <a:tcPr marL="76200" marR="76200" marT="38100" marB="38100" anchor="ctr">
+                    <a:lnL w="12700" cap="flat" cmpd="sng" algn="ctr">
+                      <a:solidFill>
+                        <a:srgbClr val="FFFFFF"/>
+                      </a:solidFill>
+                      <a:prstDash val="solid"/>
+                      <a:round/>
+                      <a:headEnd type="none" w="med" len="med"/>
+                      <a:tailEnd type="none" w="med" len="med"/>
+                    </a:lnL>
+                    <a:lnR w="12700" cap="flat" cmpd="sng" algn="ctr">
+                      <a:solidFill>
+                        <a:srgbClr val="FFFFFF"/>
+                      </a:solidFill>
+                      <a:prstDash val="solid"/>
+                      <a:round/>
+                      <a:headEnd type="none" w="med" len="med"/>
+                      <a:tailEnd type="none" w="med" len="med"/>
+                    </a:lnR>
+                    <a:lnT w="12700" cap="flat" cmpd="sng" algn="ctr">
+                      <a:solidFill>
+                        <a:srgbClr val="FFFFFF"/>
+                      </a:solidFill>
+                      <a:prstDash val="solid"/>
+                      <a:round/>
+                      <a:headEnd type="none" w="med" len="med"/>
+                      <a:tailEnd type="none" w="med" len="med"/>
+                    </a:lnT>
+                    <a:lnB w="12700" cap="flat" cmpd="sng" algn="ctr">
+                      <a:solidFill>
+                        <a:srgbClr val="FFFFFF"/>
+                      </a:solidFill>
+                      <a:prstDash val="solid"/>
+                      <a:round/>
+                      <a:headEnd type="none" w="med" len="med"/>
+                      <a:tailEnd type="none" w="med" len="med"/>
+                    </a:lnB>
+                    <a:solidFill>
+                      <a:srgbClr val="F1F5F9"/>
+                    </a:solidFill>
+                  </a:tcPr>
+                </a:tc>
+                <a:tc>
+                  <a:txBody>
+                    <a:bodyPr/>
+                    <a:lstStyle/>
+                    <a:p>
+                      <a:pPr algn="l" indent="0" marL="0">
+                        <a:buNone/>
+                      </a:pPr>
+                      <a:r>
+                        <a:rPr lang="en-US" sz="1200" dirty="0">
+                          <a:solidFill>
+                            <a:srgbClr val="1F2937"/>
+                          </a:solidFill>
+                        </a:rPr>
+                        <a:t>graded via the Wk 19 project demo, not a quiz question</a:t>
+                      </a:r>
+                      <a:endParaRPr lang="en-US" sz="1200" dirty="0"/>
+                    </a:p>
+                  </a:txBody>
+                  <a:tcPr marL="76200" marR="76200" marT="38100" marB="38100" anchor="ctr">
+                    <a:lnL w="12700" cap="flat" cmpd="sng" algn="ctr">
+                      <a:solidFill>
+                        <a:srgbClr val="FFFFFF"/>
+                      </a:solidFill>
+                      <a:prstDash val="solid"/>
+                      <a:round/>
+                      <a:headEnd type="none" w="med" len="med"/>
+                      <a:tailEnd type="none" w="med" len="med"/>
+                    </a:lnL>
+                    <a:lnR w="12700" cap="flat" cmpd="sng" algn="ctr">
+                      <a:solidFill>
+                        <a:srgbClr val="FFFFFF"/>
+                      </a:solidFill>
+                      <a:prstDash val="solid"/>
+                      <a:round/>
+                      <a:headEnd type="none" w="med" len="med"/>
+                      <a:tailEnd type="none" w="med" len="med"/>
+                    </a:lnR>
+                    <a:lnT w="12700" cap="flat" cmpd="sng" algn="ctr">
+                      <a:solidFill>
+                        <a:srgbClr val="FFFFFF"/>
+                      </a:solidFill>
+                      <a:prstDash val="solid"/>
+                      <a:round/>
+                      <a:headEnd type="none" w="med" len="med"/>
+                      <a:tailEnd type="none" w="med" len="med"/>
+                    </a:lnT>
+                    <a:lnB w="12700" cap="flat" cmpd="sng" algn="ctr">
+                      <a:solidFill>
+                        <a:srgbClr val="FFFFFF"/>
+                      </a:solidFill>
+                      <a:prstDash val="solid"/>
+                      <a:round/>
+                      <a:headEnd type="none" w="med" len="med"/>
+                      <a:tailEnd type="none" w="med" len="med"/>
+                    </a:lnB>
+                    <a:solidFill>
+                      <a:srgbClr val="F1F5F9"/>
                     </a:solidFill>
                   </a:tcPr>
                 </a:tc>
@@ -3503,7 +3779,9 @@
           <a:ln/>
         </p:spPr>
         <p:txBody>
-          <a:bodyPr wrap="square" lIns="0" tIns="0" rIns="0" bIns="0" rtlCol="0" anchor="t"/>
+          <a:bodyPr wrap="square" lIns="0" tIns="0" rIns="0" bIns="0" rtlCol="0" anchor="t">
+            <a:normAutofit/>
+          </a:bodyPr>
           <a:lstStyle/>
           <a:p>
             <a:pPr indent="0" marL="0">
@@ -4129,7 +4407,9 @@
           <a:ln/>
         </p:spPr>
         <p:txBody>
-          <a:bodyPr wrap="square" lIns="0" tIns="0" rIns="0" bIns="0" rtlCol="0" anchor="t"/>
+          <a:bodyPr wrap="square" lIns="0" tIns="0" rIns="0" bIns="0" rtlCol="0" anchor="t">
+            <a:normAutofit/>
+          </a:bodyPr>
           <a:lstStyle/>
           <a:p>
             <a:pPr indent="0" marL="0">
@@ -4144,7 +4424,7 @@
                 <a:ea typeface="Calibri" pitchFamily="34" charset="-122"/>
                 <a:cs typeface="Calibri" pitchFamily="34" charset="-120"/>
               </a:rPr>
-              <a:t>Same format as Week 19:</a:t>
+              <a:t>Not the same format as Week 19 — say so explicitly:</a:t>
             </a:r>
             <a:endParaRPr lang="en-US" sz="1400" dirty="0"/>
           </a:p>
@@ -4159,11 +4439,11 @@
         <p:spPr>
           <a:xfrm>
             <a:off x="457200" y="1965960"/>
-            <a:ext cx="8229600" cy="896112"/>
+            <a:ext cx="8229600" cy="2212848"/>
           </a:xfrm>
           <a:prstGeom prst="roundRect">
             <a:avLst>
-              <a:gd name="adj" fmla="val 8163"/>
+              <a:gd name="adj" fmla="val 3306"/>
             </a:avLst>
           </a:prstGeom>
           <a:solidFill>
@@ -4188,7 +4468,7 @@
         <p:spPr>
           <a:xfrm>
             <a:off x="731520" y="2075688"/>
-            <a:ext cx="7680960" cy="676656"/>
+            <a:ext cx="7680960" cy="1993392"/>
           </a:xfrm>
           <a:prstGeom prst="rect">
             <a:avLst/>
@@ -4197,7 +4477,9 @@
           <a:ln/>
         </p:spPr>
         <p:txBody>
-          <a:bodyPr wrap="square" lIns="0" tIns="0" rIns="0" bIns="0" rtlCol="0" anchor="t"/>
+          <a:bodyPr wrap="square" lIns="0" tIns="0" rIns="0" bIns="0" rtlCol="0" anchor="t">
+            <a:normAutofit/>
+          </a:bodyPr>
           <a:lstStyle/>
           <a:p>
             <a:pPr marL="342900" indent="-342900">
@@ -4216,7 +4498,7 @@
                 <a:ea typeface="Calibri" pitchFamily="34" charset="-122"/>
                 <a:cs typeface="Calibri" pitchFamily="34" charset="-120"/>
               </a:rPr>
-              <a:t>Web · API · supply chain · cloud · binary · LLM</a:t>
+              <a:t>8 challenges here vs. 12 in W19; Web is 1 optional callback here vs. 5 separate W19 challenges (60/150 pts)</a:t>
             </a:r>
             <a:endParaRPr lang="en-US" sz="1400" dirty="0"/>
           </a:p>
@@ -4237,7 +4519,28 @@
                 <a:ea typeface="Calibri" pitchFamily="34" charset="-122"/>
                 <a:cs typeface="Calibri" pitchFamily="34" charset="-120"/>
               </a:rPr>
-              <a:t>Team-based, leaderboard</a:t>
+              <a:t>No DevSecOps or Capstone challenge in either the mock or the W19 CTF (both stop at Week 14) — that content is examined on the Week 18 written paper instead (15/100 pts)</a:t>
+            </a:r>
+            <a:endParaRPr lang="en-US" sz="1400" dirty="0"/>
+          </a:p>
+          <a:p>
+            <a:pPr marL="342900" indent="-342900">
+              <a:spcAft>
+                <a:spcPts val="600"/>
+              </a:spcAft>
+              <a:buSzPct val="100000"/>
+              <a:buChar char="•"/>
+            </a:pPr>
+            <a:r>
+              <a:rPr lang="en-US" sz="1400" dirty="0">
+                <a:solidFill>
+                  <a:srgbClr val="1F2937"/>
+                </a:solidFill>
+                <a:latin typeface="Calibri" pitchFamily="34" charset="0"/>
+                <a:ea typeface="Calibri" pitchFamily="34" charset="-122"/>
+                <a:cs typeface="Calibri" pitchFamily="34" charset="-120"/>
+              </a:rPr>
+              <a:t>Mock has hints, ungraded; W19 has none, and is graded as half of the "Final" bucket — W18 written + W19 CTF together are 25% of the course grade, not W19 alone</a:t>
             </a:r>
             <a:endParaRPr lang="en-US" sz="1400" dirty="0"/>
           </a:p>
@@ -4422,7 +4725,7 @@
                 <a:ea typeface="Arial" pitchFamily="34" charset="-122"/>
                 <a:cs typeface="Arial" pitchFamily="34" charset="-120"/>
               </a:rPr>
-              <a:t>Exam scope reminder</a:t>
+              <a:t>🧪 Mock final CTF (cont.)</a:t>
             </a:r>
             <a:endParaRPr lang="en-US" sz="2600" dirty="0"/>
           </a:p>
@@ -4437,11 +4740,11 @@
         <p:spPr>
           <a:xfrm>
             <a:off x="457200" y="1325880"/>
-            <a:ext cx="8229600" cy="896112"/>
+            <a:ext cx="8229600" cy="786384"/>
           </a:xfrm>
           <a:prstGeom prst="roundRect">
             <a:avLst>
-              <a:gd name="adj" fmla="val 8163"/>
+              <a:gd name="adj" fmla="val 9302"/>
             </a:avLst>
           </a:prstGeom>
           <a:solidFill>
@@ -4466,7 +4769,7 @@
         <p:spPr>
           <a:xfrm>
             <a:off x="731520" y="1435608"/>
-            <a:ext cx="7680960" cy="676656"/>
+            <a:ext cx="7680960" cy="566928"/>
           </a:xfrm>
           <a:prstGeom prst="rect">
             <a:avLst/>
@@ -4475,7 +4778,9 @@
           <a:ln/>
         </p:spPr>
         <p:txBody>
-          <a:bodyPr wrap="square" lIns="0" tIns="0" rIns="0" bIns="0" rtlCol="0" anchor="t"/>
+          <a:bodyPr wrap="square" lIns="0" tIns="0" rIns="0" bIns="0" rtlCol="0" anchor="t">
+            <a:normAutofit/>
+          </a:bodyPr>
           <a:lstStyle/>
           <a:p>
             <a:pPr marL="342900" indent="-342900">
@@ -4494,28 +4799,7 @@
                 <a:ea typeface="Calibri" pitchFamily="34" charset="-122"/>
                 <a:cs typeface="Calibri" pitchFamily="34" charset="-120"/>
               </a:rPr>
-              <a:t>Wk 18 written: cumulative, emphasis on Weeks 10–16</a:t>
-            </a:r>
-            <a:endParaRPr lang="en-US" sz="1400" dirty="0"/>
-          </a:p>
-          <a:p>
-            <a:pPr marL="342900" indent="-342900">
-              <a:spcAft>
-                <a:spcPts val="600"/>
-              </a:spcAft>
-              <a:buSzPct val="100000"/>
-              <a:buChar char="•"/>
-            </a:pPr>
-            <a:r>
-              <a:rPr lang="en-US" sz="1400" dirty="0">
-                <a:solidFill>
-                  <a:srgbClr val="1F2937"/>
-                </a:solidFill>
-                <a:latin typeface="Calibri" pitchFamily="34" charset="0"/>
-                <a:ea typeface="Calibri" pitchFamily="34" charset="-122"/>
-                <a:cs typeface="Calibri" pitchFamily="34" charset="-120"/>
-              </a:rPr>
-              <a:t>Wk 19: capstone CTF tournament + final project demos</a:t>
+              <a:t>Team-based, leaderboard — the team mechanic and general flow ARE the same, just not the coverage</a:t>
             </a:r>
             <a:endParaRPr lang="en-US" sz="1400" dirty="0"/>
           </a:p>
@@ -4595,6 +4879,286 @@
 <file path=ppt/slides/slide7.xml><?xml version="1.0" encoding="utf-8"?>
 <p:sld xmlns:a="http://schemas.openxmlformats.org/drawingml/2006/main" xmlns:r="http://schemas.openxmlformats.org/officeDocument/2006/relationships" xmlns:p="http://schemas.openxmlformats.org/presentationml/2006/main">
   <p:cSld name="Slide 7">
+    <p:bg>
+      <p:bgPr>
+        <a:solidFill>
+          <a:srgbClr val="FFFFFF"/>
+        </a:solidFill>
+      </p:bgPr>
+    </p:bg>
+    <p:spTree>
+      <p:nvGrpSpPr>
+        <p:cNvPr id="1" name=""/>
+        <p:cNvGrpSpPr/>
+        <p:nvPr/>
+      </p:nvGrpSpPr>
+      <p:grpSpPr>
+        <a:xfrm>
+          <a:off x="0" y="0"/>
+          <a:ext cx="0" cy="0"/>
+          <a:chOff x="0" y="0"/>
+          <a:chExt cx="0" cy="0"/>
+        </a:xfrm>
+      </p:grpSpPr>
+      <p:sp>
+        <p:nvSpPr>
+          <p:cNvPr id="2" name="Shape 0"/>
+          <p:cNvSpPr/>
+          <p:nvPr/>
+        </p:nvSpPr>
+        <p:spPr>
+          <a:xfrm>
+            <a:off x="457200" y="384048"/>
+            <a:ext cx="530352" cy="530352"/>
+          </a:xfrm>
+          <a:prstGeom prst="ellipse">
+            <a:avLst/>
+          </a:prstGeom>
+          <a:solidFill>
+            <a:srgbClr val="E35205"/>
+          </a:solidFill>
+          <a:ln/>
+          <a:effectLst>
+            <a:outerShdw sx="100000" sy="100000" kx="0" ky="0" algn="bl" rotWithShape="0" blurRad="76200" dist="25400" dir="5400000">
+              <a:srgbClr val="000000">
+                <a:alpha val="12000"/>
+              </a:srgbClr>
+            </a:outerShdw>
+          </a:effectLst>
+        </p:spPr>
+      </p:sp>
+      <p:pic>
+        <p:nvPicPr>
+          <p:cNvPr id="3" name="Image 0" descr="preencoded.png">    </p:cNvPr>
+          <p:cNvPicPr>
+            <a:picLocks noChangeAspect="1"/>
+          </p:cNvPicPr>
+          <p:nvPr/>
+        </p:nvPicPr>
+        <p:blipFill>
+          <a:blip r:embed="rId1"/>
+          <a:stretch>
+            <a:fillRect/>
+          </a:stretch>
+        </p:blipFill>
+        <p:spPr>
+          <a:xfrm>
+            <a:off x="594360" y="521208"/>
+            <a:ext cx="256032" cy="256032"/>
+          </a:xfrm>
+          <a:prstGeom prst="rect">
+            <a:avLst/>
+          </a:prstGeom>
+        </p:spPr>
+      </p:pic>
+      <p:sp>
+        <p:nvSpPr>
+          <p:cNvPr id="4" name="Text 1"/>
+          <p:cNvSpPr/>
+          <p:nvPr/>
+        </p:nvSpPr>
+        <p:spPr>
+          <a:xfrm>
+            <a:off x="1143000" y="329184"/>
+            <a:ext cx="7498080" cy="603504"/>
+          </a:xfrm>
+          <a:prstGeom prst="rect">
+            <a:avLst/>
+          </a:prstGeom>
+          <a:noFill/>
+          <a:ln/>
+        </p:spPr>
+        <p:txBody>
+          <a:bodyPr wrap="square" lIns="0" tIns="0" rIns="0" bIns="0" rtlCol="0" anchor="ctr"/>
+          <a:lstStyle/>
+          <a:p>
+            <a:pPr indent="0" marL="0">
+              <a:buNone/>
+            </a:pPr>
+            <a:r>
+              <a:rPr lang="en-US" sz="2600" b="1" dirty="0">
+                <a:solidFill>
+                  <a:srgbClr val="1F2937"/>
+                </a:solidFill>
+                <a:latin typeface="Arial" pitchFamily="34" charset="0"/>
+                <a:ea typeface="Arial" pitchFamily="34" charset="-122"/>
+                <a:cs typeface="Arial" pitchFamily="34" charset="-120"/>
+              </a:rPr>
+              <a:t>Exam scope reminder</a:t>
+            </a:r>
+            <a:endParaRPr lang="en-US" sz="2600" dirty="0"/>
+          </a:p>
+        </p:txBody>
+      </p:sp>
+      <p:sp>
+        <p:nvSpPr>
+          <p:cNvPr id="5" name="Shape 2"/>
+          <p:cNvSpPr/>
+          <p:nvPr/>
+        </p:nvSpPr>
+        <p:spPr>
+          <a:xfrm>
+            <a:off x="457200" y="1325880"/>
+            <a:ext cx="8229600" cy="1298448"/>
+          </a:xfrm>
+          <a:prstGeom prst="roundRect">
+            <a:avLst>
+              <a:gd name="adj" fmla="val 5634"/>
+            </a:avLst>
+          </a:prstGeom>
+          <a:solidFill>
+            <a:srgbClr val="F1F5F9"/>
+          </a:solidFill>
+          <a:ln/>
+          <a:effectLst>
+            <a:outerShdw sx="100000" sy="100000" kx="0" ky="0" algn="bl" rotWithShape="0" blurRad="76200" dist="25400" dir="5400000">
+              <a:srgbClr val="000000">
+                <a:alpha val="12000"/>
+              </a:srgbClr>
+            </a:outerShdw>
+          </a:effectLst>
+        </p:spPr>
+      </p:sp>
+      <p:sp>
+        <p:nvSpPr>
+          <p:cNvPr id="6" name="Text 3"/>
+          <p:cNvSpPr/>
+          <p:nvPr/>
+        </p:nvSpPr>
+        <p:spPr>
+          <a:xfrm>
+            <a:off x="731520" y="1435608"/>
+            <a:ext cx="7680960" cy="1078992"/>
+          </a:xfrm>
+          <a:prstGeom prst="rect">
+            <a:avLst/>
+          </a:prstGeom>
+          <a:noFill/>
+          <a:ln/>
+        </p:spPr>
+        <p:txBody>
+          <a:bodyPr wrap="square" lIns="0" tIns="0" rIns="0" bIns="0" rtlCol="0" anchor="t">
+            <a:normAutofit/>
+          </a:bodyPr>
+          <a:lstStyle/>
+          <a:p>
+            <a:pPr marL="342900" indent="-342900">
+              <a:spcAft>
+                <a:spcPts val="600"/>
+              </a:spcAft>
+              <a:buSzPct val="100000"/>
+              <a:buChar char="•"/>
+            </a:pPr>
+            <a:r>
+              <a:rPr lang="en-US" sz="1400" dirty="0">
+                <a:solidFill>
+                  <a:srgbClr val="1F2937"/>
+                </a:solidFill>
+                <a:latin typeface="Calibri" pitchFamily="34" charset="0"/>
+                <a:ea typeface="Calibri" pitchFamily="34" charset="-122"/>
+                <a:cs typeface="Calibri" pitchFamily="34" charset="-120"/>
+              </a:rPr>
+              <a:t>Wk 18 written: cumulative, emphasis on Weeks 10–15 (Week 16 capstone isn't separately examined)</a:t>
+            </a:r>
+            <a:endParaRPr lang="en-US" sz="1400" dirty="0"/>
+          </a:p>
+          <a:p>
+            <a:pPr marL="342900" indent="-342900">
+              <a:spcAft>
+                <a:spcPts val="600"/>
+              </a:spcAft>
+              <a:buSzPct val="100000"/>
+              <a:buChar char="•"/>
+            </a:pPr>
+            <a:r>
+              <a:rPr lang="en-US" sz="1400" dirty="0">
+                <a:solidFill>
+                  <a:srgbClr val="1F2937"/>
+                </a:solidFill>
+                <a:latin typeface="Calibri" pitchFamily="34" charset="0"/>
+                <a:ea typeface="Calibri" pitchFamily="34" charset="-122"/>
+                <a:cs typeface="Calibri" pitchFamily="34" charset="-120"/>
+              </a:rPr>
+              <a:t>Wk 19: capstone CTF tournament + final project demos (video walkthrough submitted before the session + a short live Q&amp;A — not a live demo slot)</a:t>
+            </a:r>
+            <a:endParaRPr lang="en-US" sz="1400" dirty="0"/>
+          </a:p>
+        </p:txBody>
+      </p:sp>
+      <p:sp>
+        <p:nvSpPr>
+          <p:cNvPr id="7" name="Text 4"/>
+          <p:cNvSpPr/>
+          <p:nvPr/>
+        </p:nvSpPr>
+        <p:spPr>
+          <a:xfrm>
+            <a:off x="457200" y="4800600"/>
+            <a:ext cx="6949440" cy="274320"/>
+          </a:xfrm>
+          <a:prstGeom prst="rect">
+            <a:avLst/>
+          </a:prstGeom>
+          <a:noFill/>
+          <a:ln/>
+        </p:spPr>
+        <p:txBody>
+          <a:bodyPr wrap="square" lIns="0" tIns="0" rIns="0" bIns="0" rtlCol="0" anchor="ctr"/>
+          <a:lstStyle/>
+          <a:p>
+            <a:pPr indent="0" marL="0">
+              <a:buNone/>
+            </a:pPr>
+            <a:r>
+              <a:rPr lang="en-US" sz="900" dirty="0">
+                <a:solidFill>
+                  <a:srgbClr val="64748B"/>
+                </a:solidFill>
+                <a:latin typeface="Calibri" pitchFamily="34" charset="0"/>
+                <a:ea typeface="Calibri" pitchFamily="34" charset="-122"/>
+                <a:cs typeface="Calibri" pitchFamily="34" charset="-120"/>
+              </a:rPr>
+              <a:t>Software Security · Week 17 · Review</a:t>
+            </a:r>
+            <a:endParaRPr lang="en-US" sz="900" dirty="0"/>
+          </a:p>
+        </p:txBody>
+      </p:sp>
+      <p:pic>
+        <p:nvPicPr>
+          <p:cNvPr id="8" name="Image 1" descr="/Users/pop7/Library/CloudStorage/OneDrive-MonsterConnectCo.,Ltd/Lecture/KOSEN69 - software-security/slides/pptx/assets/logo-small.png">    </p:cNvPr>
+          <p:cNvPicPr>
+            <a:picLocks noChangeAspect="1"/>
+          </p:cNvPicPr>
+          <p:nvPr/>
+        </p:nvPicPr>
+        <p:blipFill>
+          <a:blip r:embed="rId2"/>
+          <a:stretch>
+            <a:fillRect/>
+          </a:stretch>
+        </p:blipFill>
+        <p:spPr>
+          <a:xfrm>
+            <a:off x="7882128" y="4700016"/>
+            <a:ext cx="768096" cy="356616"/>
+          </a:xfrm>
+          <a:prstGeom prst="rect">
+            <a:avLst/>
+          </a:prstGeom>
+        </p:spPr>
+      </p:pic>
+    </p:spTree>
+  </p:cSld>
+  <p:clrMapOvr>
+    <a:masterClrMapping/>
+  </p:clrMapOvr>
+</p:sld>
+</file>
+
+<file path=ppt/slides/slide8.xml><?xml version="1.0" encoding="utf-8"?>
+<p:sld xmlns:a="http://schemas.openxmlformats.org/drawingml/2006/main" xmlns:r="http://schemas.openxmlformats.org/officeDocument/2006/relationships" xmlns:p="http://schemas.openxmlformats.org/presentationml/2006/main">
+  <p:cSld name="Slide 8">
     <p:bg>
       <p:bgPr>
         <a:solidFill>

--- a/slides/pptx/week17.pptx
+++ b/slides/pptx/week17.pptx
@@ -685,7 +685,7 @@
           <a:p>
             <a:r>
               <a:rPr lang="en-US" dirty="0"/>
-              <a:t>Cold-call one student per row for the one-liner (retrieval). Week 16 gets its own row (this slide's own subtitle says "Weeks 10-16") but flag it as differently-assessed — quiz2.md doesn't examine it, the W19 demo does. Add 2–3 first-half callbacks (injection, auth) since the final is cumulative. ~10 min.</a:t>
+              <a:t>Cold-call one student per row for the one-liner (retrieval) — the diagram's own first-half callback per row IS the "add 2-3 callbacks" instruction, made concrete instead of left to memory. Week 16 is on the map but flag it as differently-assessed — quiz2.md doesn't examine it, the W19 demo does. ~10 min.</a:t>
             </a:r>
             <a:endParaRPr lang="en-US" dirty="0"/>
           </a:p>
@@ -2065,1520 +2065,50 @@
           </a:p>
         </p:txBody>
       </p:sp>
-      <p:graphicFrame>
-        <p:nvGraphicFramePr>
-          <p:cNvPr id="4" name="Table 0"/>
-          <p:cNvGraphicFramePr>
-            <a:graphicFrameLocks noGrp="1"/>
-          </p:cNvGraphicFramePr>
-          <p:nvPr>
-            <p:extLst>
-              <p:ext uri="{D42A27DB-BD31-4B8C-83A1-F6EECF244321}">
-                <p14:modId xmlns:p14="http://schemas.microsoft.com/office/powerpoint/2010/main" val="1579011935"/>
-              </p:ext>
-            </p:extLst>
-          </p:nvPr>
-        </p:nvGraphicFramePr>
-        <p:xfrm>
-          <a:off x="457200" y="1325880"/>
-          <a:ext cx="8229600" cy="914400"/>
-        </p:xfrm>
-        <a:graphic>
-          <a:graphicData uri="http://schemas.openxmlformats.org/drawingml/2006/table">
-            <a:tbl>
-              <a:tblPr/>
-              <a:tblGrid>
-                <a:gridCol w="2743200"/>
-                <a:gridCol w="2743200"/>
-                <a:gridCol w="2743200"/>
-              </a:tblGrid>
-              <a:tr h="405765">
-                <a:tc>
-                  <a:txBody>
-                    <a:bodyPr/>
-                    <a:lstStyle/>
-                    <a:p>
-                      <a:pPr algn="l" indent="0" marL="0">
-                        <a:buNone/>
-                      </a:pPr>
-                      <a:r>
-                        <a:rPr lang="en-US" sz="1250" b="1" dirty="0">
-                          <a:solidFill>
-                            <a:srgbClr val="0E1726"/>
-                          </a:solidFill>
-                        </a:rPr>
-                        <a:t>Wk</a:t>
-                      </a:r>
-                      <a:endParaRPr lang="en-US" sz="1250" dirty="0"/>
-                    </a:p>
-                  </a:txBody>
-                  <a:tcPr marL="76200" marR="76200" marT="38100" marB="38100" anchor="ctr">
-                    <a:lnL w="12700" cap="flat" cmpd="sng" algn="ctr">
-                      <a:solidFill>
-                        <a:srgbClr val="FFFFFF"/>
-                      </a:solidFill>
-                      <a:prstDash val="solid"/>
-                      <a:round/>
-                      <a:headEnd type="none" w="med" len="med"/>
-                      <a:tailEnd type="none" w="med" len="med"/>
-                    </a:lnL>
-                    <a:lnR w="12700" cap="flat" cmpd="sng" algn="ctr">
-                      <a:solidFill>
-                        <a:srgbClr val="FFFFFF"/>
-                      </a:solidFill>
-                      <a:prstDash val="solid"/>
-                      <a:round/>
-                      <a:headEnd type="none" w="med" len="med"/>
-                      <a:tailEnd type="none" w="med" len="med"/>
-                    </a:lnR>
-                    <a:lnT w="12700" cap="flat" cmpd="sng" algn="ctr">
-                      <a:solidFill>
-                        <a:srgbClr val="FFFFFF"/>
-                      </a:solidFill>
-                      <a:prstDash val="solid"/>
-                      <a:round/>
-                      <a:headEnd type="none" w="med" len="med"/>
-                      <a:tailEnd type="none" w="med" len="med"/>
-                    </a:lnT>
-                    <a:lnB w="12700" cap="flat" cmpd="sng" algn="ctr">
-                      <a:solidFill>
-                        <a:srgbClr val="FFFFFF"/>
-                      </a:solidFill>
-                      <a:prstDash val="solid"/>
-                      <a:round/>
-                      <a:headEnd type="none" w="med" len="med"/>
-                      <a:tailEnd type="none" w="med" len="med"/>
-                    </a:lnB>
-                    <a:solidFill>
-                      <a:srgbClr val="E35205"/>
-                    </a:solidFill>
-                  </a:tcPr>
-                </a:tc>
-                <a:tc>
-                  <a:txBody>
-                    <a:bodyPr/>
-                    <a:lstStyle/>
-                    <a:p>
-                      <a:pPr algn="l" indent="0" marL="0">
-                        <a:buNone/>
-                      </a:pPr>
-                      <a:r>
-                        <a:rPr lang="en-US" sz="1250" b="1" dirty="0">
-                          <a:solidFill>
-                            <a:srgbClr val="0E1726"/>
-                          </a:solidFill>
-                        </a:rPr>
-                        <a:t>Topic</a:t>
-                      </a:r>
-                      <a:endParaRPr lang="en-US" sz="1250" dirty="0"/>
-                    </a:p>
-                  </a:txBody>
-                  <a:tcPr marL="76200" marR="76200" marT="38100" marB="38100" anchor="ctr">
-                    <a:lnL w="12700" cap="flat" cmpd="sng" algn="ctr">
-                      <a:solidFill>
-                        <a:srgbClr val="FFFFFF"/>
-                      </a:solidFill>
-                      <a:prstDash val="solid"/>
-                      <a:round/>
-                      <a:headEnd type="none" w="med" len="med"/>
-                      <a:tailEnd type="none" w="med" len="med"/>
-                    </a:lnL>
-                    <a:lnR w="12700" cap="flat" cmpd="sng" algn="ctr">
-                      <a:solidFill>
-                        <a:srgbClr val="FFFFFF"/>
-                      </a:solidFill>
-                      <a:prstDash val="solid"/>
-                      <a:round/>
-                      <a:headEnd type="none" w="med" len="med"/>
-                      <a:tailEnd type="none" w="med" len="med"/>
-                    </a:lnR>
-                    <a:lnT w="12700" cap="flat" cmpd="sng" algn="ctr">
-                      <a:solidFill>
-                        <a:srgbClr val="FFFFFF"/>
-                      </a:solidFill>
-                      <a:prstDash val="solid"/>
-                      <a:round/>
-                      <a:headEnd type="none" w="med" len="med"/>
-                      <a:tailEnd type="none" w="med" len="med"/>
-                    </a:lnT>
-                    <a:lnB w="12700" cap="flat" cmpd="sng" algn="ctr">
-                      <a:solidFill>
-                        <a:srgbClr val="FFFFFF"/>
-                      </a:solidFill>
-                      <a:prstDash val="solid"/>
-                      <a:round/>
-                      <a:headEnd type="none" w="med" len="med"/>
-                      <a:tailEnd type="none" w="med" len="med"/>
-                    </a:lnB>
-                    <a:solidFill>
-                      <a:srgbClr val="E35205"/>
-                    </a:solidFill>
-                  </a:tcPr>
-                </a:tc>
-                <a:tc>
-                  <a:txBody>
-                    <a:bodyPr/>
-                    <a:lstStyle/>
-                    <a:p>
-                      <a:pPr algn="l" indent="0" marL="0">
-                        <a:buNone/>
-                      </a:pPr>
-                      <a:r>
-                        <a:rPr lang="en-US" sz="1250" b="1" dirty="0">
-                          <a:solidFill>
-                            <a:srgbClr val="0E1726"/>
-                          </a:solidFill>
-                        </a:rPr>
-                        <a:t>One-line</a:t>
-                      </a:r>
-                      <a:endParaRPr lang="en-US" sz="1250" dirty="0"/>
-                    </a:p>
-                  </a:txBody>
-                  <a:tcPr marL="76200" marR="76200" marT="38100" marB="38100" anchor="ctr">
-                    <a:lnL w="12700" cap="flat" cmpd="sng" algn="ctr">
-                      <a:solidFill>
-                        <a:srgbClr val="FFFFFF"/>
-                      </a:solidFill>
-                      <a:prstDash val="solid"/>
-                      <a:round/>
-                      <a:headEnd type="none" w="med" len="med"/>
-                      <a:tailEnd type="none" w="med" len="med"/>
-                    </a:lnL>
-                    <a:lnR w="12700" cap="flat" cmpd="sng" algn="ctr">
-                      <a:solidFill>
-                        <a:srgbClr val="FFFFFF"/>
-                      </a:solidFill>
-                      <a:prstDash val="solid"/>
-                      <a:round/>
-                      <a:headEnd type="none" w="med" len="med"/>
-                      <a:tailEnd type="none" w="med" len="med"/>
-                    </a:lnR>
-                    <a:lnT w="12700" cap="flat" cmpd="sng" algn="ctr">
-                      <a:solidFill>
-                        <a:srgbClr val="FFFFFF"/>
-                      </a:solidFill>
-                      <a:prstDash val="solid"/>
-                      <a:round/>
-                      <a:headEnd type="none" w="med" len="med"/>
-                      <a:tailEnd type="none" w="med" len="med"/>
-                    </a:lnT>
-                    <a:lnB w="12700" cap="flat" cmpd="sng" algn="ctr">
-                      <a:solidFill>
-                        <a:srgbClr val="FFFFFF"/>
-                      </a:solidFill>
-                      <a:prstDash val="solid"/>
-                      <a:round/>
-                      <a:headEnd type="none" w="med" len="med"/>
-                      <a:tailEnd type="none" w="med" len="med"/>
-                    </a:lnB>
-                    <a:solidFill>
-                      <a:srgbClr val="E35205"/>
-                    </a:solidFill>
-                  </a:tcPr>
-                </a:tc>
-              </a:tr>
-              <a:tr h="405765">
-                <a:tc>
-                  <a:txBody>
-                    <a:bodyPr/>
-                    <a:lstStyle/>
-                    <a:p>
-                      <a:pPr algn="l" indent="0" marL="0">
-                        <a:buNone/>
-                      </a:pPr>
-                      <a:r>
-                        <a:rPr lang="en-US" sz="1200" dirty="0">
-                          <a:solidFill>
-                            <a:srgbClr val="1F2937"/>
-                          </a:solidFill>
-                        </a:rPr>
-                        <a:t>10</a:t>
-                      </a:r>
-                      <a:endParaRPr lang="en-US" sz="1200" dirty="0"/>
-                    </a:p>
-                  </a:txBody>
-                  <a:tcPr marL="76200" marR="76200" marT="38100" marB="38100" anchor="ctr">
-                    <a:lnL w="12700" cap="flat" cmpd="sng" algn="ctr">
-                      <a:solidFill>
-                        <a:srgbClr val="FFFFFF"/>
-                      </a:solidFill>
-                      <a:prstDash val="solid"/>
-                      <a:round/>
-                      <a:headEnd type="none" w="med" len="med"/>
-                      <a:tailEnd type="none" w="med" len="med"/>
-                    </a:lnL>
-                    <a:lnR w="12700" cap="flat" cmpd="sng" algn="ctr">
-                      <a:solidFill>
-                        <a:srgbClr val="FFFFFF"/>
-                      </a:solidFill>
-                      <a:prstDash val="solid"/>
-                      <a:round/>
-                      <a:headEnd type="none" w="med" len="med"/>
-                      <a:tailEnd type="none" w="med" len="med"/>
-                    </a:lnR>
-                    <a:lnT w="12700" cap="flat" cmpd="sng" algn="ctr">
-                      <a:solidFill>
-                        <a:srgbClr val="FFFFFF"/>
-                      </a:solidFill>
-                      <a:prstDash val="solid"/>
-                      <a:round/>
-                      <a:headEnd type="none" w="med" len="med"/>
-                      <a:tailEnd type="none" w="med" len="med"/>
-                    </a:lnT>
-                    <a:lnB w="12700" cap="flat" cmpd="sng" algn="ctr">
-                      <a:solidFill>
-                        <a:srgbClr val="FFFFFF"/>
-                      </a:solidFill>
-                      <a:prstDash val="solid"/>
-                      <a:round/>
-                      <a:headEnd type="none" w="med" len="med"/>
-                      <a:tailEnd type="none" w="med" len="med"/>
-                    </a:lnB>
-                    <a:solidFill>
-                      <a:srgbClr val="F1F5F9"/>
-                    </a:solidFill>
-                  </a:tcPr>
-                </a:tc>
-                <a:tc>
-                  <a:txBody>
-                    <a:bodyPr/>
-                    <a:lstStyle/>
-                    <a:p>
-                      <a:pPr algn="l" indent="0" marL="0">
-                        <a:buNone/>
-                      </a:pPr>
-                      <a:r>
-                        <a:rPr lang="en-US" sz="1200" dirty="0">
-                          <a:solidFill>
-                            <a:srgbClr val="1F2937"/>
-                          </a:solidFill>
-                        </a:rPr>
-                        <a:t>API security</a:t>
-                      </a:r>
-                      <a:endParaRPr lang="en-US" sz="1200" dirty="0"/>
-                    </a:p>
-                  </a:txBody>
-                  <a:tcPr marL="76200" marR="76200" marT="38100" marB="38100" anchor="ctr">
-                    <a:lnL w="12700" cap="flat" cmpd="sng" algn="ctr">
-                      <a:solidFill>
-                        <a:srgbClr val="FFFFFF"/>
-                      </a:solidFill>
-                      <a:prstDash val="solid"/>
-                      <a:round/>
-                      <a:headEnd type="none" w="med" len="med"/>
-                      <a:tailEnd type="none" w="med" len="med"/>
-                    </a:lnL>
-                    <a:lnR w="12700" cap="flat" cmpd="sng" algn="ctr">
-                      <a:solidFill>
-                        <a:srgbClr val="FFFFFF"/>
-                      </a:solidFill>
-                      <a:prstDash val="solid"/>
-                      <a:round/>
-                      <a:headEnd type="none" w="med" len="med"/>
-                      <a:tailEnd type="none" w="med" len="med"/>
-                    </a:lnR>
-                    <a:lnT w="12700" cap="flat" cmpd="sng" algn="ctr">
-                      <a:solidFill>
-                        <a:srgbClr val="FFFFFF"/>
-                      </a:solidFill>
-                      <a:prstDash val="solid"/>
-                      <a:round/>
-                      <a:headEnd type="none" w="med" len="med"/>
-                      <a:tailEnd type="none" w="med" len="med"/>
-                    </a:lnT>
-                    <a:lnB w="12700" cap="flat" cmpd="sng" algn="ctr">
-                      <a:solidFill>
-                        <a:srgbClr val="FFFFFF"/>
-                      </a:solidFill>
-                      <a:prstDash val="solid"/>
-                      <a:round/>
-                      <a:headEnd type="none" w="med" len="med"/>
-                      <a:tailEnd type="none" w="med" len="med"/>
-                    </a:lnB>
-                    <a:solidFill>
-                      <a:srgbClr val="F1F5F9"/>
-                    </a:solidFill>
-                  </a:tcPr>
-                </a:tc>
-                <a:tc>
-                  <a:txBody>
-                    <a:bodyPr/>
-                    <a:lstStyle/>
-                    <a:p>
-                      <a:pPr algn="l" indent="0" marL="0">
-                        <a:buNone/>
-                      </a:pPr>
-                      <a:r>
-                        <a:rPr lang="en-US" sz="1200" dirty="0">
-                          <a:solidFill>
-                            <a:srgbClr val="1F2937"/>
-                          </a:solidFill>
-                        </a:rPr>
-                        <a:t>check ownership; bind intended fields</a:t>
-                      </a:r>
-                      <a:endParaRPr lang="en-US" sz="1200" dirty="0"/>
-                    </a:p>
-                  </a:txBody>
-                  <a:tcPr marL="76200" marR="76200" marT="38100" marB="38100" anchor="ctr">
-                    <a:lnL w="12700" cap="flat" cmpd="sng" algn="ctr">
-                      <a:solidFill>
-                        <a:srgbClr val="FFFFFF"/>
-                      </a:solidFill>
-                      <a:prstDash val="solid"/>
-                      <a:round/>
-                      <a:headEnd type="none" w="med" len="med"/>
-                      <a:tailEnd type="none" w="med" len="med"/>
-                    </a:lnL>
-                    <a:lnR w="12700" cap="flat" cmpd="sng" algn="ctr">
-                      <a:solidFill>
-                        <a:srgbClr val="FFFFFF"/>
-                      </a:solidFill>
-                      <a:prstDash val="solid"/>
-                      <a:round/>
-                      <a:headEnd type="none" w="med" len="med"/>
-                      <a:tailEnd type="none" w="med" len="med"/>
-                    </a:lnR>
-                    <a:lnT w="12700" cap="flat" cmpd="sng" algn="ctr">
-                      <a:solidFill>
-                        <a:srgbClr val="FFFFFF"/>
-                      </a:solidFill>
-                      <a:prstDash val="solid"/>
-                      <a:round/>
-                      <a:headEnd type="none" w="med" len="med"/>
-                      <a:tailEnd type="none" w="med" len="med"/>
-                    </a:lnT>
-                    <a:lnB w="12700" cap="flat" cmpd="sng" algn="ctr">
-                      <a:solidFill>
-                        <a:srgbClr val="FFFFFF"/>
-                      </a:solidFill>
-                      <a:prstDash val="solid"/>
-                      <a:round/>
-                      <a:headEnd type="none" w="med" len="med"/>
-                      <a:tailEnd type="none" w="med" len="med"/>
-                    </a:lnB>
-                    <a:solidFill>
-                      <a:srgbClr val="F1F5F9"/>
-                    </a:solidFill>
-                  </a:tcPr>
-                </a:tc>
-              </a:tr>
-              <a:tr h="405765">
-                <a:tc>
-                  <a:txBody>
-                    <a:bodyPr/>
-                    <a:lstStyle/>
-                    <a:p>
-                      <a:pPr algn="l" indent="0" marL="0">
-                        <a:buNone/>
-                      </a:pPr>
-                      <a:r>
-                        <a:rPr lang="en-US" sz="1200" dirty="0">
-                          <a:solidFill>
-                            <a:srgbClr val="1F2937"/>
-                          </a:solidFill>
-                        </a:rPr>
-                        <a:t>11</a:t>
-                      </a:r>
-                      <a:endParaRPr lang="en-US" sz="1200" dirty="0"/>
-                    </a:p>
-                  </a:txBody>
-                  <a:tcPr marL="76200" marR="76200" marT="38100" marB="38100" anchor="ctr">
-                    <a:lnL w="12700" cap="flat" cmpd="sng" algn="ctr">
-                      <a:solidFill>
-                        <a:srgbClr val="FFFFFF"/>
-                      </a:solidFill>
-                      <a:prstDash val="solid"/>
-                      <a:round/>
-                      <a:headEnd type="none" w="med" len="med"/>
-                      <a:tailEnd type="none" w="med" len="med"/>
-                    </a:lnL>
-                    <a:lnR w="12700" cap="flat" cmpd="sng" algn="ctr">
-                      <a:solidFill>
-                        <a:srgbClr val="FFFFFF"/>
-                      </a:solidFill>
-                      <a:prstDash val="solid"/>
-                      <a:round/>
-                      <a:headEnd type="none" w="med" len="med"/>
-                      <a:tailEnd type="none" w="med" len="med"/>
-                    </a:lnR>
-                    <a:lnT w="12700" cap="flat" cmpd="sng" algn="ctr">
-                      <a:solidFill>
-                        <a:srgbClr val="FFFFFF"/>
-                      </a:solidFill>
-                      <a:prstDash val="solid"/>
-                      <a:round/>
-                      <a:headEnd type="none" w="med" len="med"/>
-                      <a:tailEnd type="none" w="med" len="med"/>
-                    </a:lnT>
-                    <a:lnB w="12700" cap="flat" cmpd="sng" algn="ctr">
-                      <a:solidFill>
-                        <a:srgbClr val="FFFFFF"/>
-                      </a:solidFill>
-                      <a:prstDash val="solid"/>
-                      <a:round/>
-                      <a:headEnd type="none" w="med" len="med"/>
-                      <a:tailEnd type="none" w="med" len="med"/>
-                    </a:lnB>
-                    <a:solidFill>
-                      <a:srgbClr val="E8EDF3"/>
-                    </a:solidFill>
-                  </a:tcPr>
-                </a:tc>
-                <a:tc>
-                  <a:txBody>
-                    <a:bodyPr/>
-                    <a:lstStyle/>
-                    <a:p>
-                      <a:pPr algn="l" indent="0" marL="0">
-                        <a:buNone/>
-                      </a:pPr>
-                      <a:r>
-                        <a:rPr lang="en-US" sz="1200" dirty="0">
-                          <a:solidFill>
-                            <a:srgbClr val="1F2937"/>
-                          </a:solidFill>
-                        </a:rPr>
-                        <a:t>Memory safety</a:t>
-                      </a:r>
-                      <a:endParaRPr lang="en-US" sz="1200" dirty="0"/>
-                    </a:p>
-                  </a:txBody>
-                  <a:tcPr marL="76200" marR="76200" marT="38100" marB="38100" anchor="ctr">
-                    <a:lnL w="12700" cap="flat" cmpd="sng" algn="ctr">
-                      <a:solidFill>
-                        <a:srgbClr val="FFFFFF"/>
-                      </a:solidFill>
-                      <a:prstDash val="solid"/>
-                      <a:round/>
-                      <a:headEnd type="none" w="med" len="med"/>
-                      <a:tailEnd type="none" w="med" len="med"/>
-                    </a:lnL>
-                    <a:lnR w="12700" cap="flat" cmpd="sng" algn="ctr">
-                      <a:solidFill>
-                        <a:srgbClr val="FFFFFF"/>
-                      </a:solidFill>
-                      <a:prstDash val="solid"/>
-                      <a:round/>
-                      <a:headEnd type="none" w="med" len="med"/>
-                      <a:tailEnd type="none" w="med" len="med"/>
-                    </a:lnR>
-                    <a:lnT w="12700" cap="flat" cmpd="sng" algn="ctr">
-                      <a:solidFill>
-                        <a:srgbClr val="FFFFFF"/>
-                      </a:solidFill>
-                      <a:prstDash val="solid"/>
-                      <a:round/>
-                      <a:headEnd type="none" w="med" len="med"/>
-                      <a:tailEnd type="none" w="med" len="med"/>
-                    </a:lnT>
-                    <a:lnB w="12700" cap="flat" cmpd="sng" algn="ctr">
-                      <a:solidFill>
-                        <a:srgbClr val="FFFFFF"/>
-                      </a:solidFill>
-                      <a:prstDash val="solid"/>
-                      <a:round/>
-                      <a:headEnd type="none" w="med" len="med"/>
-                      <a:tailEnd type="none" w="med" len="med"/>
-                    </a:lnB>
-                    <a:solidFill>
-                      <a:srgbClr val="E8EDF3"/>
-                    </a:solidFill>
-                  </a:tcPr>
-                </a:tc>
-                <a:tc>
-                  <a:txBody>
-                    <a:bodyPr/>
-                    <a:lstStyle/>
-                    <a:p>
-                      <a:pPr algn="l" indent="0" marL="0">
-                        <a:buNone/>
-                      </a:pPr>
-                      <a:r>
-                        <a:rPr lang="en-US" sz="1200" dirty="0">
-                          <a:solidFill>
-                            <a:srgbClr val="1F2937"/>
-                          </a:solidFill>
-                        </a:rPr>
-                        <a:t>fuzz, exploit, go memory-safe</a:t>
-                      </a:r>
-                      <a:endParaRPr lang="en-US" sz="1200" dirty="0"/>
-                    </a:p>
-                  </a:txBody>
-                  <a:tcPr marL="76200" marR="76200" marT="38100" marB="38100" anchor="ctr">
-                    <a:lnL w="12700" cap="flat" cmpd="sng" algn="ctr">
-                      <a:solidFill>
-                        <a:srgbClr val="FFFFFF"/>
-                      </a:solidFill>
-                      <a:prstDash val="solid"/>
-                      <a:round/>
-                      <a:headEnd type="none" w="med" len="med"/>
-                      <a:tailEnd type="none" w="med" len="med"/>
-                    </a:lnL>
-                    <a:lnR w="12700" cap="flat" cmpd="sng" algn="ctr">
-                      <a:solidFill>
-                        <a:srgbClr val="FFFFFF"/>
-                      </a:solidFill>
-                      <a:prstDash val="solid"/>
-                      <a:round/>
-                      <a:headEnd type="none" w="med" len="med"/>
-                      <a:tailEnd type="none" w="med" len="med"/>
-                    </a:lnR>
-                    <a:lnT w="12700" cap="flat" cmpd="sng" algn="ctr">
-                      <a:solidFill>
-                        <a:srgbClr val="FFFFFF"/>
-                      </a:solidFill>
-                      <a:prstDash val="solid"/>
-                      <a:round/>
-                      <a:headEnd type="none" w="med" len="med"/>
-                      <a:tailEnd type="none" w="med" len="med"/>
-                    </a:lnT>
-                    <a:lnB w="12700" cap="flat" cmpd="sng" algn="ctr">
-                      <a:solidFill>
-                        <a:srgbClr val="FFFFFF"/>
-                      </a:solidFill>
-                      <a:prstDash val="solid"/>
-                      <a:round/>
-                      <a:headEnd type="none" w="med" len="med"/>
-                      <a:tailEnd type="none" w="med" len="med"/>
-                    </a:lnB>
-                    <a:solidFill>
-                      <a:srgbClr val="E8EDF3"/>
-                    </a:solidFill>
-                  </a:tcPr>
-                </a:tc>
-              </a:tr>
-              <a:tr h="405765">
-                <a:tc>
-                  <a:txBody>
-                    <a:bodyPr/>
-                    <a:lstStyle/>
-                    <a:p>
-                      <a:pPr algn="l" indent="0" marL="0">
-                        <a:buNone/>
-                      </a:pPr>
-                      <a:r>
-                        <a:rPr lang="en-US" sz="1200" dirty="0">
-                          <a:solidFill>
-                            <a:srgbClr val="1F2937"/>
-                          </a:solidFill>
-                        </a:rPr>
-                        <a:t>12</a:t>
-                      </a:r>
-                      <a:endParaRPr lang="en-US" sz="1200" dirty="0"/>
-                    </a:p>
-                  </a:txBody>
-                  <a:tcPr marL="76200" marR="76200" marT="38100" marB="38100" anchor="ctr">
-                    <a:lnL w="12700" cap="flat" cmpd="sng" algn="ctr">
-                      <a:solidFill>
-                        <a:srgbClr val="FFFFFF"/>
-                      </a:solidFill>
-                      <a:prstDash val="solid"/>
-                      <a:round/>
-                      <a:headEnd type="none" w="med" len="med"/>
-                      <a:tailEnd type="none" w="med" len="med"/>
-                    </a:lnL>
-                    <a:lnR w="12700" cap="flat" cmpd="sng" algn="ctr">
-                      <a:solidFill>
-                        <a:srgbClr val="FFFFFF"/>
-                      </a:solidFill>
-                      <a:prstDash val="solid"/>
-                      <a:round/>
-                      <a:headEnd type="none" w="med" len="med"/>
-                      <a:tailEnd type="none" w="med" len="med"/>
-                    </a:lnR>
-                    <a:lnT w="12700" cap="flat" cmpd="sng" algn="ctr">
-                      <a:solidFill>
-                        <a:srgbClr val="FFFFFF"/>
-                      </a:solidFill>
-                      <a:prstDash val="solid"/>
-                      <a:round/>
-                      <a:headEnd type="none" w="med" len="med"/>
-                      <a:tailEnd type="none" w="med" len="med"/>
-                    </a:lnT>
-                    <a:lnB w="12700" cap="flat" cmpd="sng" algn="ctr">
-                      <a:solidFill>
-                        <a:srgbClr val="FFFFFF"/>
-                      </a:solidFill>
-                      <a:prstDash val="solid"/>
-                      <a:round/>
-                      <a:headEnd type="none" w="med" len="med"/>
-                      <a:tailEnd type="none" w="med" len="med"/>
-                    </a:lnB>
-                    <a:solidFill>
-                      <a:srgbClr val="F1F5F9"/>
-                    </a:solidFill>
-                  </a:tcPr>
-                </a:tc>
-                <a:tc>
-                  <a:txBody>
-                    <a:bodyPr/>
-                    <a:lstStyle/>
-                    <a:p>
-                      <a:pPr algn="l" indent="0" marL="0">
-                        <a:buNone/>
-                      </a:pPr>
-                      <a:r>
-                        <a:rPr lang="en-US" sz="1200" dirty="0">
-                          <a:solidFill>
-                            <a:srgbClr val="1F2937"/>
-                          </a:solidFill>
-                        </a:rPr>
-                        <a:t>Supply chain</a:t>
-                      </a:r>
-                      <a:endParaRPr lang="en-US" sz="1200" dirty="0"/>
-                    </a:p>
-                  </a:txBody>
-                  <a:tcPr marL="76200" marR="76200" marT="38100" marB="38100" anchor="ctr">
-                    <a:lnL w="12700" cap="flat" cmpd="sng" algn="ctr">
-                      <a:solidFill>
-                        <a:srgbClr val="FFFFFF"/>
-                      </a:solidFill>
-                      <a:prstDash val="solid"/>
-                      <a:round/>
-                      <a:headEnd type="none" w="med" len="med"/>
-                      <a:tailEnd type="none" w="med" len="med"/>
-                    </a:lnL>
-                    <a:lnR w="12700" cap="flat" cmpd="sng" algn="ctr">
-                      <a:solidFill>
-                        <a:srgbClr val="FFFFFF"/>
-                      </a:solidFill>
-                      <a:prstDash val="solid"/>
-                      <a:round/>
-                      <a:headEnd type="none" w="med" len="med"/>
-                      <a:tailEnd type="none" w="med" len="med"/>
-                    </a:lnR>
-                    <a:lnT w="12700" cap="flat" cmpd="sng" algn="ctr">
-                      <a:solidFill>
-                        <a:srgbClr val="FFFFFF"/>
-                      </a:solidFill>
-                      <a:prstDash val="solid"/>
-                      <a:round/>
-                      <a:headEnd type="none" w="med" len="med"/>
-                      <a:tailEnd type="none" w="med" len="med"/>
-                    </a:lnT>
-                    <a:lnB w="12700" cap="flat" cmpd="sng" algn="ctr">
-                      <a:solidFill>
-                        <a:srgbClr val="FFFFFF"/>
-                      </a:solidFill>
-                      <a:prstDash val="solid"/>
-                      <a:round/>
-                      <a:headEnd type="none" w="med" len="med"/>
-                      <a:tailEnd type="none" w="med" len="med"/>
-                    </a:lnB>
-                    <a:solidFill>
-                      <a:srgbClr val="F1F5F9"/>
-                    </a:solidFill>
-                  </a:tcPr>
-                </a:tc>
-                <a:tc>
-                  <a:txBody>
-                    <a:bodyPr/>
-                    <a:lstStyle/>
-                    <a:p>
-                      <a:pPr algn="l" indent="0" marL="0">
-                        <a:buNone/>
-                      </a:pPr>
-                      <a:r>
-                        <a:rPr lang="en-US" sz="1200" dirty="0">
-                          <a:solidFill>
-                            <a:srgbClr val="1F2937"/>
-                          </a:solidFill>
-                        </a:rPr>
-                        <a:t>SBOM, SLSA, sign &amp; verify</a:t>
-                      </a:r>
-                      <a:endParaRPr lang="en-US" sz="1200" dirty="0"/>
-                    </a:p>
-                  </a:txBody>
-                  <a:tcPr marL="76200" marR="76200" marT="38100" marB="38100" anchor="ctr">
-                    <a:lnL w="12700" cap="flat" cmpd="sng" algn="ctr">
-                      <a:solidFill>
-                        <a:srgbClr val="FFFFFF"/>
-                      </a:solidFill>
-                      <a:prstDash val="solid"/>
-                      <a:round/>
-                      <a:headEnd type="none" w="med" len="med"/>
-                      <a:tailEnd type="none" w="med" len="med"/>
-                    </a:lnL>
-                    <a:lnR w="12700" cap="flat" cmpd="sng" algn="ctr">
-                      <a:solidFill>
-                        <a:srgbClr val="FFFFFF"/>
-                      </a:solidFill>
-                      <a:prstDash val="solid"/>
-                      <a:round/>
-                      <a:headEnd type="none" w="med" len="med"/>
-                      <a:tailEnd type="none" w="med" len="med"/>
-                    </a:lnR>
-                    <a:lnT w="12700" cap="flat" cmpd="sng" algn="ctr">
-                      <a:solidFill>
-                        <a:srgbClr val="FFFFFF"/>
-                      </a:solidFill>
-                      <a:prstDash val="solid"/>
-                      <a:round/>
-                      <a:headEnd type="none" w="med" len="med"/>
-                      <a:tailEnd type="none" w="med" len="med"/>
-                    </a:lnT>
-                    <a:lnB w="12700" cap="flat" cmpd="sng" algn="ctr">
-                      <a:solidFill>
-                        <a:srgbClr val="FFFFFF"/>
-                      </a:solidFill>
-                      <a:prstDash val="solid"/>
-                      <a:round/>
-                      <a:headEnd type="none" w="med" len="med"/>
-                      <a:tailEnd type="none" w="med" len="med"/>
-                    </a:lnB>
-                    <a:solidFill>
-                      <a:srgbClr val="F1F5F9"/>
-                    </a:solidFill>
-                  </a:tcPr>
-                </a:tc>
-              </a:tr>
-              <a:tr h="405765">
-                <a:tc>
-                  <a:txBody>
-                    <a:bodyPr/>
-                    <a:lstStyle/>
-                    <a:p>
-                      <a:pPr algn="l" indent="0" marL="0">
-                        <a:buNone/>
-                      </a:pPr>
-                      <a:r>
-                        <a:rPr lang="en-US" sz="1200" dirty="0">
-                          <a:solidFill>
-                            <a:srgbClr val="1F2937"/>
-                          </a:solidFill>
-                        </a:rPr>
-                        <a:t>13</a:t>
-                      </a:r>
-                      <a:endParaRPr lang="en-US" sz="1200" dirty="0"/>
-                    </a:p>
-                  </a:txBody>
-                  <a:tcPr marL="76200" marR="76200" marT="38100" marB="38100" anchor="ctr">
-                    <a:lnL w="12700" cap="flat" cmpd="sng" algn="ctr">
-                      <a:solidFill>
-                        <a:srgbClr val="FFFFFF"/>
-                      </a:solidFill>
-                      <a:prstDash val="solid"/>
-                      <a:round/>
-                      <a:headEnd type="none" w="med" len="med"/>
-                      <a:tailEnd type="none" w="med" len="med"/>
-                    </a:lnL>
-                    <a:lnR w="12700" cap="flat" cmpd="sng" algn="ctr">
-                      <a:solidFill>
-                        <a:srgbClr val="FFFFFF"/>
-                      </a:solidFill>
-                      <a:prstDash val="solid"/>
-                      <a:round/>
-                      <a:headEnd type="none" w="med" len="med"/>
-                      <a:tailEnd type="none" w="med" len="med"/>
-                    </a:lnR>
-                    <a:lnT w="12700" cap="flat" cmpd="sng" algn="ctr">
-                      <a:solidFill>
-                        <a:srgbClr val="FFFFFF"/>
-                      </a:solidFill>
-                      <a:prstDash val="solid"/>
-                      <a:round/>
-                      <a:headEnd type="none" w="med" len="med"/>
-                      <a:tailEnd type="none" w="med" len="med"/>
-                    </a:lnT>
-                    <a:lnB w="12700" cap="flat" cmpd="sng" algn="ctr">
-                      <a:solidFill>
-                        <a:srgbClr val="FFFFFF"/>
-                      </a:solidFill>
-                      <a:prstDash val="solid"/>
-                      <a:round/>
-                      <a:headEnd type="none" w="med" len="med"/>
-                      <a:tailEnd type="none" w="med" len="med"/>
-                    </a:lnB>
-                    <a:solidFill>
-                      <a:srgbClr val="E8EDF3"/>
-                    </a:solidFill>
-                  </a:tcPr>
-                </a:tc>
-                <a:tc>
-                  <a:txBody>
-                    <a:bodyPr/>
-                    <a:lstStyle/>
-                    <a:p>
-                      <a:pPr algn="l" indent="0" marL="0">
-                        <a:buNone/>
-                      </a:pPr>
-                      <a:r>
-                        <a:rPr lang="en-US" sz="1200" dirty="0">
-                          <a:solidFill>
-                            <a:srgbClr val="1F2937"/>
-                          </a:solidFill>
-                        </a:rPr>
-                        <a:t>Cloud/container</a:t>
-                      </a:r>
-                      <a:endParaRPr lang="en-US" sz="1200" dirty="0"/>
-                    </a:p>
-                  </a:txBody>
-                  <a:tcPr marL="76200" marR="76200" marT="38100" marB="38100" anchor="ctr">
-                    <a:lnL w="12700" cap="flat" cmpd="sng" algn="ctr">
-                      <a:solidFill>
-                        <a:srgbClr val="FFFFFF"/>
-                      </a:solidFill>
-                      <a:prstDash val="solid"/>
-                      <a:round/>
-                      <a:headEnd type="none" w="med" len="med"/>
-                      <a:tailEnd type="none" w="med" len="med"/>
-                    </a:lnL>
-                    <a:lnR w="12700" cap="flat" cmpd="sng" algn="ctr">
-                      <a:solidFill>
-                        <a:srgbClr val="FFFFFF"/>
-                      </a:solidFill>
-                      <a:prstDash val="solid"/>
-                      <a:round/>
-                      <a:headEnd type="none" w="med" len="med"/>
-                      <a:tailEnd type="none" w="med" len="med"/>
-                    </a:lnR>
-                    <a:lnT w="12700" cap="flat" cmpd="sng" algn="ctr">
-                      <a:solidFill>
-                        <a:srgbClr val="FFFFFF"/>
-                      </a:solidFill>
-                      <a:prstDash val="solid"/>
-                      <a:round/>
-                      <a:headEnd type="none" w="med" len="med"/>
-                      <a:tailEnd type="none" w="med" len="med"/>
-                    </a:lnT>
-                    <a:lnB w="12700" cap="flat" cmpd="sng" algn="ctr">
-                      <a:solidFill>
-                        <a:srgbClr val="FFFFFF"/>
-                      </a:solidFill>
-                      <a:prstDash val="solid"/>
-                      <a:round/>
-                      <a:headEnd type="none" w="med" len="med"/>
-                      <a:tailEnd type="none" w="med" len="med"/>
-                    </a:lnB>
-                    <a:solidFill>
-                      <a:srgbClr val="E8EDF3"/>
-                    </a:solidFill>
-                  </a:tcPr>
-                </a:tc>
-                <a:tc>
-                  <a:txBody>
-                    <a:bodyPr/>
-                    <a:lstStyle/>
-                    <a:p>
-                      <a:pPr algn="l" indent="0" marL="0">
-                        <a:buNone/>
-                      </a:pPr>
-                      <a:r>
-                        <a:rPr lang="en-US" sz="1200" dirty="0">
-                          <a:solidFill>
-                            <a:srgbClr val="1F2937"/>
-                          </a:solidFill>
-                        </a:rPr>
-                        <a:t>least privilege, no misconfig</a:t>
-                      </a:r>
-                      <a:endParaRPr lang="en-US" sz="1200" dirty="0"/>
-                    </a:p>
-                  </a:txBody>
-                  <a:tcPr marL="76200" marR="76200" marT="38100" marB="38100" anchor="ctr">
-                    <a:lnL w="12700" cap="flat" cmpd="sng" algn="ctr">
-                      <a:solidFill>
-                        <a:srgbClr val="FFFFFF"/>
-                      </a:solidFill>
-                      <a:prstDash val="solid"/>
-                      <a:round/>
-                      <a:headEnd type="none" w="med" len="med"/>
-                      <a:tailEnd type="none" w="med" len="med"/>
-                    </a:lnL>
-                    <a:lnR w="12700" cap="flat" cmpd="sng" algn="ctr">
-                      <a:solidFill>
-                        <a:srgbClr val="FFFFFF"/>
-                      </a:solidFill>
-                      <a:prstDash val="solid"/>
-                      <a:round/>
-                      <a:headEnd type="none" w="med" len="med"/>
-                      <a:tailEnd type="none" w="med" len="med"/>
-                    </a:lnR>
-                    <a:lnT w="12700" cap="flat" cmpd="sng" algn="ctr">
-                      <a:solidFill>
-                        <a:srgbClr val="FFFFFF"/>
-                      </a:solidFill>
-                      <a:prstDash val="solid"/>
-                      <a:round/>
-                      <a:headEnd type="none" w="med" len="med"/>
-                      <a:tailEnd type="none" w="med" len="med"/>
-                    </a:lnT>
-                    <a:lnB w="12700" cap="flat" cmpd="sng" algn="ctr">
-                      <a:solidFill>
-                        <a:srgbClr val="FFFFFF"/>
-                      </a:solidFill>
-                      <a:prstDash val="solid"/>
-                      <a:round/>
-                      <a:headEnd type="none" w="med" len="med"/>
-                      <a:tailEnd type="none" w="med" len="med"/>
-                    </a:lnB>
-                    <a:solidFill>
-                      <a:srgbClr val="E8EDF3"/>
-                    </a:solidFill>
-                  </a:tcPr>
-                </a:tc>
-              </a:tr>
-              <a:tr h="405765">
-                <a:tc>
-                  <a:txBody>
-                    <a:bodyPr/>
-                    <a:lstStyle/>
-                    <a:p>
-                      <a:pPr algn="l" indent="0" marL="0">
-                        <a:buNone/>
-                      </a:pPr>
-                      <a:r>
-                        <a:rPr lang="en-US" sz="1200" dirty="0">
-                          <a:solidFill>
-                            <a:srgbClr val="1F2937"/>
-                          </a:solidFill>
-                        </a:rPr>
-                        <a:t>14</a:t>
-                      </a:r>
-                      <a:endParaRPr lang="en-US" sz="1200" dirty="0"/>
-                    </a:p>
-                  </a:txBody>
-                  <a:tcPr marL="76200" marR="76200" marT="38100" marB="38100" anchor="ctr">
-                    <a:lnL w="12700" cap="flat" cmpd="sng" algn="ctr">
-                      <a:solidFill>
-                        <a:srgbClr val="FFFFFF"/>
-                      </a:solidFill>
-                      <a:prstDash val="solid"/>
-                      <a:round/>
-                      <a:headEnd type="none" w="med" len="med"/>
-                      <a:tailEnd type="none" w="med" len="med"/>
-                    </a:lnL>
-                    <a:lnR w="12700" cap="flat" cmpd="sng" algn="ctr">
-                      <a:solidFill>
-                        <a:srgbClr val="FFFFFF"/>
-                      </a:solidFill>
-                      <a:prstDash val="solid"/>
-                      <a:round/>
-                      <a:headEnd type="none" w="med" len="med"/>
-                      <a:tailEnd type="none" w="med" len="med"/>
-                    </a:lnR>
-                    <a:lnT w="12700" cap="flat" cmpd="sng" algn="ctr">
-                      <a:solidFill>
-                        <a:srgbClr val="FFFFFF"/>
-                      </a:solidFill>
-                      <a:prstDash val="solid"/>
-                      <a:round/>
-                      <a:headEnd type="none" w="med" len="med"/>
-                      <a:tailEnd type="none" w="med" len="med"/>
-                    </a:lnT>
-                    <a:lnB w="12700" cap="flat" cmpd="sng" algn="ctr">
-                      <a:solidFill>
-                        <a:srgbClr val="FFFFFF"/>
-                      </a:solidFill>
-                      <a:prstDash val="solid"/>
-                      <a:round/>
-                      <a:headEnd type="none" w="med" len="med"/>
-                      <a:tailEnd type="none" w="med" len="med"/>
-                    </a:lnB>
-                    <a:solidFill>
-                      <a:srgbClr val="F1F5F9"/>
-                    </a:solidFill>
-                  </a:tcPr>
-                </a:tc>
-                <a:tc>
-                  <a:txBody>
-                    <a:bodyPr/>
-                    <a:lstStyle/>
-                    <a:p>
-                      <a:pPr algn="l" indent="0" marL="0">
-                        <a:buNone/>
-                      </a:pPr>
-                      <a:r>
-                        <a:rPr lang="en-US" sz="1200" dirty="0">
-                          <a:solidFill>
-                            <a:srgbClr val="1F2937"/>
-                          </a:solidFill>
-                        </a:rPr>
-                        <a:t>AI/LLM</a:t>
-                      </a:r>
-                      <a:endParaRPr lang="en-US" sz="1200" dirty="0"/>
-                    </a:p>
-                  </a:txBody>
-                  <a:tcPr marL="76200" marR="76200" marT="38100" marB="38100" anchor="ctr">
-                    <a:lnL w="12700" cap="flat" cmpd="sng" algn="ctr">
-                      <a:solidFill>
-                        <a:srgbClr val="FFFFFF"/>
-                      </a:solidFill>
-                      <a:prstDash val="solid"/>
-                      <a:round/>
-                      <a:headEnd type="none" w="med" len="med"/>
-                      <a:tailEnd type="none" w="med" len="med"/>
-                    </a:lnL>
-                    <a:lnR w="12700" cap="flat" cmpd="sng" algn="ctr">
-                      <a:solidFill>
-                        <a:srgbClr val="FFFFFF"/>
-                      </a:solidFill>
-                      <a:prstDash val="solid"/>
-                      <a:round/>
-                      <a:headEnd type="none" w="med" len="med"/>
-                      <a:tailEnd type="none" w="med" len="med"/>
-                    </a:lnR>
-                    <a:lnT w="12700" cap="flat" cmpd="sng" algn="ctr">
-                      <a:solidFill>
-                        <a:srgbClr val="FFFFFF"/>
-                      </a:solidFill>
-                      <a:prstDash val="solid"/>
-                      <a:round/>
-                      <a:headEnd type="none" w="med" len="med"/>
-                      <a:tailEnd type="none" w="med" len="med"/>
-                    </a:lnT>
-                    <a:lnB w="12700" cap="flat" cmpd="sng" algn="ctr">
-                      <a:solidFill>
-                        <a:srgbClr val="FFFFFF"/>
-                      </a:solidFill>
-                      <a:prstDash val="solid"/>
-                      <a:round/>
-                      <a:headEnd type="none" w="med" len="med"/>
-                      <a:tailEnd type="none" w="med" len="med"/>
-                    </a:lnB>
-                    <a:solidFill>
-                      <a:srgbClr val="F1F5F9"/>
-                    </a:solidFill>
-                  </a:tcPr>
-                </a:tc>
-                <a:tc>
-                  <a:txBody>
-                    <a:bodyPr/>
-                    <a:lstStyle/>
-                    <a:p>
-                      <a:pPr algn="l" indent="0" marL="0">
-                        <a:buNone/>
-                      </a:pPr>
-                      <a:r>
-                        <a:rPr lang="en-US" sz="1200" dirty="0">
-                          <a:solidFill>
-                            <a:srgbClr val="1F2937"/>
-                          </a:solidFill>
-                        </a:rPr>
-                        <a:t>prompt injection; least-privilege tools</a:t>
-                      </a:r>
-                      <a:endParaRPr lang="en-US" sz="1200" dirty="0"/>
-                    </a:p>
-                  </a:txBody>
-                  <a:tcPr marL="76200" marR="76200" marT="38100" marB="38100" anchor="ctr">
-                    <a:lnL w="12700" cap="flat" cmpd="sng" algn="ctr">
-                      <a:solidFill>
-                        <a:srgbClr val="FFFFFF"/>
-                      </a:solidFill>
-                      <a:prstDash val="solid"/>
-                      <a:round/>
-                      <a:headEnd type="none" w="med" len="med"/>
-                      <a:tailEnd type="none" w="med" len="med"/>
-                    </a:lnL>
-                    <a:lnR w="12700" cap="flat" cmpd="sng" algn="ctr">
-                      <a:solidFill>
-                        <a:srgbClr val="FFFFFF"/>
-                      </a:solidFill>
-                      <a:prstDash val="solid"/>
-                      <a:round/>
-                      <a:headEnd type="none" w="med" len="med"/>
-                      <a:tailEnd type="none" w="med" len="med"/>
-                    </a:lnR>
-                    <a:lnT w="12700" cap="flat" cmpd="sng" algn="ctr">
-                      <a:solidFill>
-                        <a:srgbClr val="FFFFFF"/>
-                      </a:solidFill>
-                      <a:prstDash val="solid"/>
-                      <a:round/>
-                      <a:headEnd type="none" w="med" len="med"/>
-                      <a:tailEnd type="none" w="med" len="med"/>
-                    </a:lnT>
-                    <a:lnB w="12700" cap="flat" cmpd="sng" algn="ctr">
-                      <a:solidFill>
-                        <a:srgbClr val="FFFFFF"/>
-                      </a:solidFill>
-                      <a:prstDash val="solid"/>
-                      <a:round/>
-                      <a:headEnd type="none" w="med" len="med"/>
-                      <a:tailEnd type="none" w="med" len="med"/>
-                    </a:lnB>
-                    <a:solidFill>
-                      <a:srgbClr val="F1F5F9"/>
-                    </a:solidFill>
-                  </a:tcPr>
-                </a:tc>
-              </a:tr>
-              <a:tr h="405765">
-                <a:tc>
-                  <a:txBody>
-                    <a:bodyPr/>
-                    <a:lstStyle/>
-                    <a:p>
-                      <a:pPr algn="l" indent="0" marL="0">
-                        <a:buNone/>
-                      </a:pPr>
-                      <a:r>
-                        <a:rPr lang="en-US" sz="1200" dirty="0">
-                          <a:solidFill>
-                            <a:srgbClr val="1F2937"/>
-                          </a:solidFill>
-                        </a:rPr>
-                        <a:t>15</a:t>
-                      </a:r>
-                      <a:endParaRPr lang="en-US" sz="1200" dirty="0"/>
-                    </a:p>
-                  </a:txBody>
-                  <a:tcPr marL="76200" marR="76200" marT="38100" marB="38100" anchor="ctr">
-                    <a:lnL w="12700" cap="flat" cmpd="sng" algn="ctr">
-                      <a:solidFill>
-                        <a:srgbClr val="FFFFFF"/>
-                      </a:solidFill>
-                      <a:prstDash val="solid"/>
-                      <a:round/>
-                      <a:headEnd type="none" w="med" len="med"/>
-                      <a:tailEnd type="none" w="med" len="med"/>
-                    </a:lnL>
-                    <a:lnR w="12700" cap="flat" cmpd="sng" algn="ctr">
-                      <a:solidFill>
-                        <a:srgbClr val="FFFFFF"/>
-                      </a:solidFill>
-                      <a:prstDash val="solid"/>
-                      <a:round/>
-                      <a:headEnd type="none" w="med" len="med"/>
-                      <a:tailEnd type="none" w="med" len="med"/>
-                    </a:lnR>
-                    <a:lnT w="12700" cap="flat" cmpd="sng" algn="ctr">
-                      <a:solidFill>
-                        <a:srgbClr val="FFFFFF"/>
-                      </a:solidFill>
-                      <a:prstDash val="solid"/>
-                      <a:round/>
-                      <a:headEnd type="none" w="med" len="med"/>
-                      <a:tailEnd type="none" w="med" len="med"/>
-                    </a:lnT>
-                    <a:lnB w="12700" cap="flat" cmpd="sng" algn="ctr">
-                      <a:solidFill>
-                        <a:srgbClr val="FFFFFF"/>
-                      </a:solidFill>
-                      <a:prstDash val="solid"/>
-                      <a:round/>
-                      <a:headEnd type="none" w="med" len="med"/>
-                      <a:tailEnd type="none" w="med" len="med"/>
-                    </a:lnB>
-                    <a:solidFill>
-                      <a:srgbClr val="E8EDF3"/>
-                    </a:solidFill>
-                  </a:tcPr>
-                </a:tc>
-                <a:tc>
-                  <a:txBody>
-                    <a:bodyPr/>
-                    <a:lstStyle/>
-                    <a:p>
-                      <a:pPr algn="l" indent="0" marL="0">
-                        <a:buNone/>
-                      </a:pPr>
-                      <a:r>
-                        <a:rPr lang="en-US" sz="1200" dirty="0">
-                          <a:solidFill>
-                            <a:srgbClr val="1F2937"/>
-                          </a:solidFill>
-                        </a:rPr>
-                        <a:t>DevSecOps</a:t>
-                      </a:r>
-                      <a:endParaRPr lang="en-US" sz="1200" dirty="0"/>
-                    </a:p>
-                  </a:txBody>
-                  <a:tcPr marL="76200" marR="76200" marT="38100" marB="38100" anchor="ctr">
-                    <a:lnL w="12700" cap="flat" cmpd="sng" algn="ctr">
-                      <a:solidFill>
-                        <a:srgbClr val="FFFFFF"/>
-                      </a:solidFill>
-                      <a:prstDash val="solid"/>
-                      <a:round/>
-                      <a:headEnd type="none" w="med" len="med"/>
-                      <a:tailEnd type="none" w="med" len="med"/>
-                    </a:lnL>
-                    <a:lnR w="12700" cap="flat" cmpd="sng" algn="ctr">
-                      <a:solidFill>
-                        <a:srgbClr val="FFFFFF"/>
-                      </a:solidFill>
-                      <a:prstDash val="solid"/>
-                      <a:round/>
-                      <a:headEnd type="none" w="med" len="med"/>
-                      <a:tailEnd type="none" w="med" len="med"/>
-                    </a:lnR>
-                    <a:lnT w="12700" cap="flat" cmpd="sng" algn="ctr">
-                      <a:solidFill>
-                        <a:srgbClr val="FFFFFF"/>
-                      </a:solidFill>
-                      <a:prstDash val="solid"/>
-                      <a:round/>
-                      <a:headEnd type="none" w="med" len="med"/>
-                      <a:tailEnd type="none" w="med" len="med"/>
-                    </a:lnT>
-                    <a:lnB w="12700" cap="flat" cmpd="sng" algn="ctr">
-                      <a:solidFill>
-                        <a:srgbClr val="FFFFFF"/>
-                      </a:solidFill>
-                      <a:prstDash val="solid"/>
-                      <a:round/>
-                      <a:headEnd type="none" w="med" len="med"/>
-                      <a:tailEnd type="none" w="med" len="med"/>
-                    </a:lnB>
-                    <a:solidFill>
-                      <a:srgbClr val="E8EDF3"/>
-                    </a:solidFill>
-                  </a:tcPr>
-                </a:tc>
-                <a:tc>
-                  <a:txBody>
-                    <a:bodyPr/>
-                    <a:lstStyle/>
-                    <a:p>
-                      <a:pPr algn="l" indent="0" marL="0">
-                        <a:buNone/>
-                      </a:pPr>
-                      <a:r>
-                        <a:rPr lang="en-US" sz="1200" dirty="0">
-                          <a:solidFill>
-                            <a:srgbClr val="1F2937"/>
-                          </a:solidFill>
-                        </a:rPr>
-                        <a:t>automated gates; fail closed</a:t>
-                      </a:r>
-                      <a:endParaRPr lang="en-US" sz="1200" dirty="0"/>
-                    </a:p>
-                  </a:txBody>
-                  <a:tcPr marL="76200" marR="76200" marT="38100" marB="38100" anchor="ctr">
-                    <a:lnL w="12700" cap="flat" cmpd="sng" algn="ctr">
-                      <a:solidFill>
-                        <a:srgbClr val="FFFFFF"/>
-                      </a:solidFill>
-                      <a:prstDash val="solid"/>
-                      <a:round/>
-                      <a:headEnd type="none" w="med" len="med"/>
-                      <a:tailEnd type="none" w="med" len="med"/>
-                    </a:lnL>
-                    <a:lnR w="12700" cap="flat" cmpd="sng" algn="ctr">
-                      <a:solidFill>
-                        <a:srgbClr val="FFFFFF"/>
-                      </a:solidFill>
-                      <a:prstDash val="solid"/>
-                      <a:round/>
-                      <a:headEnd type="none" w="med" len="med"/>
-                      <a:tailEnd type="none" w="med" len="med"/>
-                    </a:lnR>
-                    <a:lnT w="12700" cap="flat" cmpd="sng" algn="ctr">
-                      <a:solidFill>
-                        <a:srgbClr val="FFFFFF"/>
-                      </a:solidFill>
-                      <a:prstDash val="solid"/>
-                      <a:round/>
-                      <a:headEnd type="none" w="med" len="med"/>
-                      <a:tailEnd type="none" w="med" len="med"/>
-                    </a:lnT>
-                    <a:lnB w="12700" cap="flat" cmpd="sng" algn="ctr">
-                      <a:solidFill>
-                        <a:srgbClr val="FFFFFF"/>
-                      </a:solidFill>
-                      <a:prstDash val="solid"/>
-                      <a:round/>
-                      <a:headEnd type="none" w="med" len="med"/>
-                      <a:tailEnd type="none" w="med" len="med"/>
-                    </a:lnB>
-                    <a:solidFill>
-                      <a:srgbClr val="E8EDF3"/>
-                    </a:solidFill>
-                  </a:tcPr>
-                </a:tc>
-              </a:tr>
-              <a:tr h="405765">
-                <a:tc>
-                  <a:txBody>
-                    <a:bodyPr/>
-                    <a:lstStyle/>
-                    <a:p>
-                      <a:pPr algn="l" indent="0" marL="0">
-                        <a:buNone/>
-                      </a:pPr>
-                      <a:r>
-                        <a:rPr lang="en-US" sz="1200" dirty="0">
-                          <a:solidFill>
-                            <a:srgbClr val="1F2937"/>
-                          </a:solidFill>
-                        </a:rPr>
-                        <a:t>16</a:t>
-                      </a:r>
-                      <a:endParaRPr lang="en-US" sz="1200" dirty="0"/>
-                    </a:p>
-                  </a:txBody>
-                  <a:tcPr marL="76200" marR="76200" marT="38100" marB="38100" anchor="ctr">
-                    <a:lnL w="12700" cap="flat" cmpd="sng" algn="ctr">
-                      <a:solidFill>
-                        <a:srgbClr val="FFFFFF"/>
-                      </a:solidFill>
-                      <a:prstDash val="solid"/>
-                      <a:round/>
-                      <a:headEnd type="none" w="med" len="med"/>
-                      <a:tailEnd type="none" w="med" len="med"/>
-                    </a:lnL>
-                    <a:lnR w="12700" cap="flat" cmpd="sng" algn="ctr">
-                      <a:solidFill>
-                        <a:srgbClr val="FFFFFF"/>
-                      </a:solidFill>
-                      <a:prstDash val="solid"/>
-                      <a:round/>
-                      <a:headEnd type="none" w="med" len="med"/>
-                      <a:tailEnd type="none" w="med" len="med"/>
-                    </a:lnR>
-                    <a:lnT w="12700" cap="flat" cmpd="sng" algn="ctr">
-                      <a:solidFill>
-                        <a:srgbClr val="FFFFFF"/>
-                      </a:solidFill>
-                      <a:prstDash val="solid"/>
-                      <a:round/>
-                      <a:headEnd type="none" w="med" len="med"/>
-                      <a:tailEnd type="none" w="med" len="med"/>
-                    </a:lnT>
-                    <a:lnB w="12700" cap="flat" cmpd="sng" algn="ctr">
-                      <a:solidFill>
-                        <a:srgbClr val="FFFFFF"/>
-                      </a:solidFill>
-                      <a:prstDash val="solid"/>
-                      <a:round/>
-                      <a:headEnd type="none" w="med" len="med"/>
-                      <a:tailEnd type="none" w="med" len="med"/>
-                    </a:lnB>
-                    <a:solidFill>
-                      <a:srgbClr val="F1F5F9"/>
-                    </a:solidFill>
-                  </a:tcPr>
-                </a:tc>
-                <a:tc>
-                  <a:txBody>
-                    <a:bodyPr/>
-                    <a:lstStyle/>
-                    <a:p>
-                      <a:pPr algn="l" indent="0" marL="0">
-                        <a:buNone/>
-                      </a:pPr>
-                      <a:r>
-                        <a:rPr lang="en-US" sz="1200" dirty="0">
-                          <a:solidFill>
-                            <a:srgbClr val="1F2937"/>
-                          </a:solidFill>
-                        </a:rPr>
-                        <a:t>Capstone</a:t>
-                      </a:r>
-                      <a:endParaRPr lang="en-US" sz="1200" dirty="0"/>
-                    </a:p>
-                  </a:txBody>
-                  <a:tcPr marL="76200" marR="76200" marT="38100" marB="38100" anchor="ctr">
-                    <a:lnL w="12700" cap="flat" cmpd="sng" algn="ctr">
-                      <a:solidFill>
-                        <a:srgbClr val="FFFFFF"/>
-                      </a:solidFill>
-                      <a:prstDash val="solid"/>
-                      <a:round/>
-                      <a:headEnd type="none" w="med" len="med"/>
-                      <a:tailEnd type="none" w="med" len="med"/>
-                    </a:lnL>
-                    <a:lnR w="12700" cap="flat" cmpd="sng" algn="ctr">
-                      <a:solidFill>
-                        <a:srgbClr val="FFFFFF"/>
-                      </a:solidFill>
-                      <a:prstDash val="solid"/>
-                      <a:round/>
-                      <a:headEnd type="none" w="med" len="med"/>
-                      <a:tailEnd type="none" w="med" len="med"/>
-                    </a:lnR>
-                    <a:lnT w="12700" cap="flat" cmpd="sng" algn="ctr">
-                      <a:solidFill>
-                        <a:srgbClr val="FFFFFF"/>
-                      </a:solidFill>
-                      <a:prstDash val="solid"/>
-                      <a:round/>
-                      <a:headEnd type="none" w="med" len="med"/>
-                      <a:tailEnd type="none" w="med" len="med"/>
-                    </a:lnT>
-                    <a:lnB w="12700" cap="flat" cmpd="sng" algn="ctr">
-                      <a:solidFill>
-                        <a:srgbClr val="FFFFFF"/>
-                      </a:solidFill>
-                      <a:prstDash val="solid"/>
-                      <a:round/>
-                      <a:headEnd type="none" w="med" len="med"/>
-                      <a:tailEnd type="none" w="med" len="med"/>
-                    </a:lnB>
-                    <a:solidFill>
-                      <a:srgbClr val="F1F5F9"/>
-                    </a:solidFill>
-                  </a:tcPr>
-                </a:tc>
-                <a:tc>
-                  <a:txBody>
-                    <a:bodyPr/>
-                    <a:lstStyle/>
-                    <a:p>
-                      <a:pPr algn="l" indent="0" marL="0">
-                        <a:buNone/>
-                      </a:pPr>
-                      <a:r>
-                        <a:rPr lang="en-US" sz="1200" dirty="0">
-                          <a:solidFill>
-                            <a:srgbClr val="1F2937"/>
-                          </a:solidFill>
-                        </a:rPr>
-                        <a:t>graded via the Wk 19 project demo, not a quiz question</a:t>
-                      </a:r>
-                      <a:endParaRPr lang="en-US" sz="1200" dirty="0"/>
-                    </a:p>
-                  </a:txBody>
-                  <a:tcPr marL="76200" marR="76200" marT="38100" marB="38100" anchor="ctr">
-                    <a:lnL w="12700" cap="flat" cmpd="sng" algn="ctr">
-                      <a:solidFill>
-                        <a:srgbClr val="FFFFFF"/>
-                      </a:solidFill>
-                      <a:prstDash val="solid"/>
-                      <a:round/>
-                      <a:headEnd type="none" w="med" len="med"/>
-                      <a:tailEnd type="none" w="med" len="med"/>
-                    </a:lnL>
-                    <a:lnR w="12700" cap="flat" cmpd="sng" algn="ctr">
-                      <a:solidFill>
-                        <a:srgbClr val="FFFFFF"/>
-                      </a:solidFill>
-                      <a:prstDash val="solid"/>
-                      <a:round/>
-                      <a:headEnd type="none" w="med" len="med"/>
-                      <a:tailEnd type="none" w="med" len="med"/>
-                    </a:lnR>
-                    <a:lnT w="12700" cap="flat" cmpd="sng" algn="ctr">
-                      <a:solidFill>
-                        <a:srgbClr val="FFFFFF"/>
-                      </a:solidFill>
-                      <a:prstDash val="solid"/>
-                      <a:round/>
-                      <a:headEnd type="none" w="med" len="med"/>
-                      <a:tailEnd type="none" w="med" len="med"/>
-                    </a:lnT>
-                    <a:lnB w="12700" cap="flat" cmpd="sng" algn="ctr">
-                      <a:solidFill>
-                        <a:srgbClr val="FFFFFF"/>
-                      </a:solidFill>
-                      <a:prstDash val="solid"/>
-                      <a:round/>
-                      <a:headEnd type="none" w="med" len="med"/>
-                      <a:tailEnd type="none" w="med" len="med"/>
-                    </a:lnB>
-                    <a:solidFill>
-                      <a:srgbClr val="F1F5F9"/>
-                    </a:solidFill>
-                  </a:tcPr>
-                </a:tc>
-              </a:tr>
-            </a:tbl>
-          </a:graphicData>
-        </a:graphic>
-      </p:graphicFrame>
-      <p:sp>
-        <p:nvSpPr>
-          <p:cNvPr id="6" name="Text 2"/>
+      <p:sp>
+        <p:nvSpPr>
+          <p:cNvPr id="5" name="Text 2"/>
+          <p:cNvSpPr/>
+          <p:nvPr/>
+        </p:nvSpPr>
+        <p:spPr>
+          <a:xfrm>
+            <a:off x="548640" y="1325880"/>
+            <a:ext cx="8046720" cy="3246120"/>
+          </a:xfrm>
+          <a:prstGeom prst="rect">
+            <a:avLst/>
+          </a:prstGeom>
+          <a:noFill/>
+          <a:ln/>
+        </p:spPr>
+        <p:txBody>
+          <a:bodyPr wrap="square" lIns="0" tIns="0" rIns="0" bIns="0" rtlCol="0" anchor="t">
+            <a:normAutofit/>
+          </a:bodyPr>
+          <a:lstStyle/>
+          <a:p>
+            <a:pPr indent="0" marL="0">
+              <a:buNone/>
+            </a:pPr>
+            <a:r>
+              <a:rPr lang="en-US" sz="1400" dirty="0">
+                <a:solidFill>
+                  <a:srgbClr val="1F2937"/>
+                </a:solidFill>
+                <a:latin typeface="Calibri" pitchFamily="34" charset="0"/>
+                <a:ea typeface="Calibri" pitchFamily="34" charset="-122"/>
+                <a:cs typeface="Calibri" pitchFamily="34" charset="-120"/>
+              </a:rPr>
+              <a:t>See diagram: A revision map for weeks 10 to 16, built on three spine properties every control needs: at a boundary, checked server-side per request (week 10's /api/users/3/orders); on by default, the safe path the only path (week 11's safe.rs bounds checks); fail closed, deny and log the reason, never the secret (week 15's port 8090 vs 8091). Then one row per week, each tied back to a first-half week it builds on: 10 API security builds on 6 authorization; 11 memory safety builds on 4 injection, the sink is now the stack; 12 supply chain builds on 2 SDLC, the scanner is now SCA/SBOM/cosign; 13 cloud/container builds on 3 crypto, a baked-in key is not a secret; 14 AI/LLM builds on 5 XSS, model output is untrusted input; 15 DevSecOps builds on 2 tooling, the same scanners now stop the build; 16 capstone builds on 1 threat modeling, the week 1 DFD is deliverable one. (web only)</a:t>
+            </a:r>
+            <a:endParaRPr lang="en-US" sz="1400" dirty="0"/>
+          </a:p>
+        </p:txBody>
+      </p:sp>
+      <p:sp>
+        <p:nvSpPr>
+          <p:cNvPr id="6" name="Text 3"/>
           <p:cNvSpPr/>
           <p:nvPr/>
         </p:nvSpPr>
